--- a/Model_Benchmark/ppt/RNGD_Benchmark.pptx
+++ b/Model_Benchmark/ppt/RNGD_Benchmark.pptx
@@ -21,9 +21,11 @@
     <p:sldId id="269" r:id="rId15"/>
     <p:sldId id="270" r:id="rId16"/>
     <p:sldId id="271" r:id="rId17"/>
+    <p:sldId id="272" r:id="rId18"/>
+    <p:sldId id="273" r:id="rId19"/>
   </p:sldIdLst>
   <p:notesMasterIdLst>
-    <p:notesMasterId r:id="rId18"/>
+    <p:notesMasterId r:id="rId20"/>
   </p:notesMasterIdLst>
   <p:sldSz cx="12191695" cy="6858000"/>
   <p:notesSz cx="6858000" cy="12191695"/>
@@ -2318,6 +2320,182 @@
 </p:notes>
 </file>
 
+<file path=ppt/notesSlides/notesSlide17.xml><?xml version="1.0" encoding="utf-8"?>
+<p:notes xmlns:a="http://schemas.openxmlformats.org/drawingml/2006/main" xmlns:r="http://schemas.openxmlformats.org/officeDocument/2006/relationships" xmlns:p="http://schemas.openxmlformats.org/presentationml/2006/main">
+  <p:cSld>
+    <p:spTree>
+      <p:nvGrpSpPr>
+        <p:cNvPr id="1" name=""/>
+        <p:cNvGrpSpPr/>
+        <p:nvPr/>
+      </p:nvGrpSpPr>
+      <p:grpSpPr>
+        <a:xfrm>
+          <a:off x="0" y="0"/>
+          <a:ext cx="0" cy="0"/>
+          <a:chOff x="0" y="0"/>
+          <a:chExt cx="0" cy="0"/>
+        </a:xfrm>
+      </p:grpSpPr>
+      <p:sp>
+        <p:nvSpPr>
+          <p:cNvPr id="2" name="Slide Image Placeholder 1"/>
+          <p:cNvSpPr>
+            <a:spLocks noGrp="1" noRot="1" noChangeAspect="1"/>
+          </p:cNvSpPr>
+          <p:nvPr>
+            <p:ph type="sldImg"/>
+          </p:nvPr>
+        </p:nvSpPr>
+        <p:spPr/>
+      </p:sp>
+      <p:sp>
+        <p:nvSpPr>
+          <p:cNvPr id="3" name="Notes Placeholder 2"/>
+          <p:cNvSpPr>
+            <a:spLocks noGrp="1"/>
+          </p:cNvSpPr>
+          <p:nvPr>
+            <p:ph type="body" idx="1"/>
+          </p:nvPr>
+        </p:nvSpPr>
+        <p:spPr/>
+        <p:txBody>
+          <a:bodyPr/>
+          <a:lstStyle/>
+          <a:p>
+            <a:r>
+              <a:rPr lang="en-US" dirty="0"/>
+              <a:t/>
+            </a:r>
+            <a:endParaRPr lang="en-US" dirty="0"/>
+          </a:p>
+        </p:txBody>
+      </p:sp>
+      <p:sp>
+        <p:nvSpPr>
+          <p:cNvPr id="4" name="Slide Number Placeholder 3"/>
+          <p:cNvSpPr>
+            <a:spLocks noGrp="1"/>
+          </p:cNvSpPr>
+          <p:nvPr>
+            <p:ph type="sldNum" sz="quarter" idx="10"/>
+          </p:nvPr>
+        </p:nvSpPr>
+        <p:spPr/>
+        <p:txBody>
+          <a:bodyPr/>
+          <a:lstStyle/>
+          <a:p>
+            <a:fld id="{F7021451-1387-4CA6-816F-3879F97B5CBC}" type="slidenum">
+              <a:rPr lang="en-US"/>
+              <a:t>17</a:t>
+            </a:fld>
+            <a:endParaRPr lang="en-US"/>
+          </a:p>
+        </p:txBody>
+      </p:sp>
+    </p:spTree>
+    <p:extLst>
+      <p:ext uri="{BB962C8B-B14F-4D97-AF65-F5344CB8AC3E}">
+        <p14:creationId xmlns:p14="http://schemas.microsoft.com/office/powerpoint/2010/main" val="1024086991"/>
+      </p:ext>
+    </p:extLst>
+  </p:cSld>
+  <p:clrMapOvr>
+    <a:masterClrMapping/>
+  </p:clrMapOvr>
+</p:notes>
+</file>
+
+<file path=ppt/notesSlides/notesSlide18.xml><?xml version="1.0" encoding="utf-8"?>
+<p:notes xmlns:a="http://schemas.openxmlformats.org/drawingml/2006/main" xmlns:r="http://schemas.openxmlformats.org/officeDocument/2006/relationships" xmlns:p="http://schemas.openxmlformats.org/presentationml/2006/main">
+  <p:cSld>
+    <p:spTree>
+      <p:nvGrpSpPr>
+        <p:cNvPr id="1" name=""/>
+        <p:cNvGrpSpPr/>
+        <p:nvPr/>
+      </p:nvGrpSpPr>
+      <p:grpSpPr>
+        <a:xfrm>
+          <a:off x="0" y="0"/>
+          <a:ext cx="0" cy="0"/>
+          <a:chOff x="0" y="0"/>
+          <a:chExt cx="0" cy="0"/>
+        </a:xfrm>
+      </p:grpSpPr>
+      <p:sp>
+        <p:nvSpPr>
+          <p:cNvPr id="2" name="Slide Image Placeholder 1"/>
+          <p:cNvSpPr>
+            <a:spLocks noGrp="1" noRot="1" noChangeAspect="1"/>
+          </p:cNvSpPr>
+          <p:nvPr>
+            <p:ph type="sldImg"/>
+          </p:nvPr>
+        </p:nvSpPr>
+        <p:spPr/>
+      </p:sp>
+      <p:sp>
+        <p:nvSpPr>
+          <p:cNvPr id="3" name="Notes Placeholder 2"/>
+          <p:cNvSpPr>
+            <a:spLocks noGrp="1"/>
+          </p:cNvSpPr>
+          <p:nvPr>
+            <p:ph type="body" idx="1"/>
+          </p:nvPr>
+        </p:nvSpPr>
+        <p:spPr/>
+        <p:txBody>
+          <a:bodyPr/>
+          <a:lstStyle/>
+          <a:p>
+            <a:r>
+              <a:rPr lang="en-US" dirty="0"/>
+              <a:t/>
+            </a:r>
+            <a:endParaRPr lang="en-US" dirty="0"/>
+          </a:p>
+        </p:txBody>
+      </p:sp>
+      <p:sp>
+        <p:nvSpPr>
+          <p:cNvPr id="4" name="Slide Number Placeholder 3"/>
+          <p:cNvSpPr>
+            <a:spLocks noGrp="1"/>
+          </p:cNvSpPr>
+          <p:nvPr>
+            <p:ph type="sldNum" sz="quarter" idx="10"/>
+          </p:nvPr>
+        </p:nvSpPr>
+        <p:spPr/>
+        <p:txBody>
+          <a:bodyPr/>
+          <a:lstStyle/>
+          <a:p>
+            <a:fld id="{F7021451-1387-4CA6-816F-3879F97B5CBC}" type="slidenum">
+              <a:rPr lang="en-US"/>
+              <a:t>18</a:t>
+            </a:fld>
+            <a:endParaRPr lang="en-US"/>
+          </a:p>
+        </p:txBody>
+      </p:sp>
+    </p:spTree>
+    <p:extLst>
+      <p:ext uri="{BB962C8B-B14F-4D97-AF65-F5344CB8AC3E}">
+        <p14:creationId xmlns:p14="http://schemas.microsoft.com/office/powerpoint/2010/main" val="1024086991"/>
+      </p:ext>
+    </p:extLst>
+  </p:cSld>
+  <p:clrMapOvr>
+    <a:masterClrMapping/>
+  </p:clrMapOvr>
+</p:notes>
+</file>
+
 <file path=ppt/notesSlides/notesSlide2.xml><?xml version="1.0" encoding="utf-8"?>
 <p:notes xmlns:a="http://schemas.openxmlformats.org/drawingml/2006/main" xmlns:r="http://schemas.openxmlformats.org/officeDocument/2006/relationships" xmlns:p="http://schemas.openxmlformats.org/presentationml/2006/main">
   <p:cSld>
@@ -4271,7 +4449,7 @@
                 <a:ea typeface="Paperlogy 5 Medium" pitchFamily="34" charset="-122"/>
                 <a:cs typeface="Paperlogy 5 Medium" pitchFamily="34" charset="-120"/>
               </a:rPr>
-              <a:t>10 / 16</a:t>
+              <a:t>10 / 18</a:t>
             </a:r>
             <a:endParaRPr lang="en-US" sz="1000" dirty="0"/>
           </a:p>
@@ -5850,7 +6028,7 @@
                 <a:ea typeface="Paperlogy 5 Medium" pitchFamily="34" charset="-122"/>
                 <a:cs typeface="Paperlogy 5 Medium" pitchFamily="34" charset="-120"/>
               </a:rPr>
-              <a:t>11 / 16</a:t>
+              <a:t>11 / 18</a:t>
             </a:r>
             <a:endParaRPr lang="en-US" sz="1000" dirty="0"/>
           </a:p>
@@ -6959,7 +7137,7 @@
                 <a:ea typeface="Paperlogy 5 Medium" pitchFamily="34" charset="-122"/>
                 <a:cs typeface="Paperlogy 5 Medium" pitchFamily="34" charset="-120"/>
               </a:rPr>
-              <a:t>12 / 16</a:t>
+              <a:t>12 / 18</a:t>
             </a:r>
             <a:endParaRPr lang="en-US" sz="1000" dirty="0"/>
           </a:p>
@@ -8552,7 +8730,7 @@
                 <a:ea typeface="Paperlogy 5 Medium" pitchFamily="34" charset="-122"/>
                 <a:cs typeface="Paperlogy 5 Medium" pitchFamily="34" charset="-120"/>
               </a:rPr>
-              <a:t>13 / 16</a:t>
+              <a:t>13 / 18</a:t>
             </a:r>
             <a:endParaRPr lang="en-US" sz="1000" dirty="0"/>
           </a:p>
@@ -9352,7 +9530,7 @@
                 <a:ea typeface="Paperlogy 5 Medium" pitchFamily="34" charset="-122"/>
                 <a:cs typeface="Paperlogy 5 Medium" pitchFamily="34" charset="-120"/>
               </a:rPr>
-              <a:t>14 / 16</a:t>
+              <a:t>14 / 18</a:t>
             </a:r>
             <a:endParaRPr lang="en-US" sz="1000" dirty="0"/>
           </a:p>
@@ -10442,7 +10620,7 @@
                 <a:ea typeface="Paperlogy 5 Medium" pitchFamily="34" charset="-122"/>
                 <a:cs typeface="Paperlogy 5 Medium" pitchFamily="34" charset="-120"/>
               </a:rPr>
-              <a:t>정확도는 모델이 결정, 속도는 하드웨어가 결정 — 같은 모델이면 GPU에서도 SWE-bench 결과는 비슷할 것. NPU↔GPU 비교의 핵심은 속도·처리량.</a:t>
+              <a:t>정확도는 모델이 결정, 속도는 하드웨어가 결정 — 다음 슬라이드에서 같은 모델의 공개 GPU SWE-bench 수치로 이를 대조한다.</a:t>
             </a:r>
             <a:endParaRPr lang="en-US" sz="1050" dirty="0"/>
           </a:p>
@@ -10513,7 +10691,7 @@
                 <a:ea typeface="Paperlogy 6 SemiBold" pitchFamily="34" charset="-122"/>
                 <a:cs typeface="Paperlogy 6 SemiBold" pitchFamily="34" charset="-120"/>
               </a:rPr>
-              <a:t>TEST 5 · EMBEDDING</a:t>
+              <a:t>TEST 4 · SWE-BENCH ⑥</a:t>
             </a:r>
             <a:endParaRPr lang="en-US" sz="1200" dirty="0"/>
           </a:p>
@@ -10552,7 +10730,7 @@
                 <a:ea typeface="Paperlogy 5 Medium" pitchFamily="34" charset="-122"/>
                 <a:cs typeface="Paperlogy 5 Medium" pitchFamily="34" charset="-120"/>
               </a:rPr>
-              <a:t>15 / 16</a:t>
+              <a:t>15 / 18</a:t>
             </a:r>
             <a:endParaRPr lang="en-US" sz="1000" dirty="0"/>
           </a:p>
@@ -10591,7 +10769,7 @@
                 <a:ea typeface="Paperlogy 4 Regular" pitchFamily="34" charset="-122"/>
                 <a:cs typeface="Paperlogy 4 Regular" pitchFamily="34" charset="-120"/>
               </a:rPr>
-              <a:t>출처: bench/results · embed / rerank task</a:t>
+              <a:t>출처: SWE-bench·SWE-Fixer·SWE-RL 논문 — 모두 GPU/클라우드 실행</a:t>
             </a:r>
             <a:endParaRPr lang="en-US" sz="950" dirty="0"/>
           </a:p>
@@ -10633,7 +10811,7 @@
                 <a:ea typeface="Paperlogy 7 Bold" pitchFamily="34" charset="-122"/>
                 <a:cs typeface="Paperlogy 7 Bold" pitchFamily="34" charset="-120"/>
               </a:rPr>
-              <a:t>테스트 5 — 임베딩 · 리랭커</a:t>
+              <a:t>테스트 4 — SWE-bench ⑥: 일반 GPU 환경 결과 대조</a:t>
             </a:r>
             <a:endParaRPr lang="en-US" sz="3100" dirty="0"/>
           </a:p>
@@ -10675,7 +10853,7 @@
                 <a:ea typeface="Paperlogy 5 Medium" pitchFamily="34" charset="-122"/>
                 <a:cs typeface="Paperlogy 5 Medium" pitchFamily="34" charset="-120"/>
               </a:rPr>
-              <a:t>검색 보조 모델(Qwen3-Embedding-8B · Qwen3-Reranker-8B)의 처리량 측정</a:t>
+              <a:t>RNGD 0/50 — 같은 모델·같은 single-shot 방식의 공개 GPU 수치와 비교</a:t>
             </a:r>
             <a:endParaRPr lang="en-US" sz="1500" dirty="0"/>
           </a:p>
@@ -10690,11 +10868,140 @@
         <p:spPr>
           <a:xfrm>
             <a:off x="457200" y="2185416"/>
-            <a:ext cx="3637178" cy="1097280"/>
+            <a:ext cx="11277295" cy="768096"/>
           </a:xfrm>
           <a:prstGeom prst="roundRect">
             <a:avLst>
-              <a:gd name="adj" fmla="val 10833"/>
+              <a:gd name="adj" fmla="val 19048"/>
+            </a:avLst>
+          </a:prstGeom>
+          <a:solidFill>
+            <a:srgbClr val="1456F0"/>
+          </a:solidFill>
+          <a:ln/>
+          <a:effectLst>
+            <a:outerShdw sx="100000" sy="100000" kx="0" ky="0" algn="bl" rotWithShape="0" blurRad="190500" dist="50800" dir="5400000">
+              <a:srgbClr val="2c1e74">
+                <a:alpha val="16000"/>
+              </a:srgbClr>
+            </a:outerShdw>
+          </a:effectLst>
+        </p:spPr>
+      </p:sp>
+      <p:sp>
+        <p:nvSpPr>
+          <p:cNvPr id="8" name="Shape 6"/>
+          <p:cNvSpPr/>
+          <p:nvPr/>
+        </p:nvSpPr>
+        <p:spPr>
+          <a:xfrm>
+            <a:off x="749808" y="2423160"/>
+            <a:ext cx="841248" cy="292608"/>
+          </a:xfrm>
+          <a:prstGeom prst="roundRect">
+            <a:avLst>
+              <a:gd name="adj" fmla="val 50000"/>
+            </a:avLst>
+          </a:prstGeom>
+          <a:solidFill>
+            <a:srgbClr val="FFFFFF"/>
+          </a:solidFill>
+          <a:ln/>
+        </p:spPr>
+      </p:sp>
+      <p:sp>
+        <p:nvSpPr>
+          <p:cNvPr id="9" name="Text 7"/>
+          <p:cNvSpPr/>
+          <p:nvPr/>
+        </p:nvSpPr>
+        <p:spPr>
+          <a:xfrm>
+            <a:off x="749808" y="2423160"/>
+            <a:ext cx="841248" cy="292608"/>
+          </a:xfrm>
+          <a:prstGeom prst="rect">
+            <a:avLst/>
+          </a:prstGeom>
+          <a:noFill/>
+          <a:ln/>
+        </p:spPr>
+        <p:txBody>
+          <a:bodyPr wrap="square" lIns="0" tIns="0" rIns="0" bIns="0" rtlCol="0" anchor="ctr"/>
+          <a:lstStyle/>
+          <a:p>
+            <a:pPr algn="ctr" indent="0" marL="0">
+              <a:buNone/>
+            </a:pPr>
+            <a:r>
+              <a:rPr lang="en-US" sz="1000" dirty="0">
+                <a:solidFill>
+                  <a:srgbClr val="1456F0"/>
+                </a:solidFill>
+                <a:latin typeface="Paperlogy 6 SemiBold" pitchFamily="34" charset="0"/>
+                <a:ea typeface="Paperlogy 6 SemiBold" pitchFamily="34" charset="-122"/>
+                <a:cs typeface="Paperlogy 6 SemiBold" pitchFamily="34" charset="-120"/>
+              </a:rPr>
+              <a:t>결론</a:t>
+            </a:r>
+            <a:endParaRPr lang="en-US" sz="1000" dirty="0"/>
+          </a:p>
+        </p:txBody>
+      </p:sp>
+      <p:sp>
+        <p:nvSpPr>
+          <p:cNvPr id="10" name="Text 8"/>
+          <p:cNvSpPr/>
+          <p:nvPr/>
+        </p:nvSpPr>
+        <p:spPr>
+          <a:xfrm>
+            <a:off x="1737360" y="2185416"/>
+            <a:ext cx="10287000" cy="768096"/>
+          </a:xfrm>
+          <a:prstGeom prst="rect">
+            <a:avLst/>
+          </a:prstGeom>
+          <a:noFill/>
+          <a:ln/>
+        </p:spPr>
+        <p:txBody>
+          <a:bodyPr wrap="square" lIns="0" tIns="0" rIns="0" bIns="0" rtlCol="0" anchor="ctr"/>
+          <a:lstStyle/>
+          <a:p>
+            <a:pPr indent="0" marL="0">
+              <a:buNone/>
+            </a:pPr>
+            <a:r>
+              <a:rPr lang="en-US" sz="1400" dirty="0">
+                <a:solidFill>
+                  <a:srgbClr val="FFFFFF"/>
+                </a:solidFill>
+                <a:latin typeface="Paperlogy 7 Bold" pitchFamily="34" charset="0"/>
+                <a:ea typeface="Paperlogy 7 Bold" pitchFamily="34" charset="-122"/>
+                <a:cs typeface="Paperlogy 7 Bold" pitchFamily="34" charset="-120"/>
+              </a:rPr>
+              <a:t>같은 모델·같은 single-shot이면 GPU에서도 SWE-bench는 ~0% — 정확도를 가르는 건 하드웨어가 아니라 모델 크기·스캐폴드</a:t>
+            </a:r>
+            <a:endParaRPr lang="en-US" sz="1400" dirty="0"/>
+          </a:p>
+        </p:txBody>
+      </p:sp>
+      <p:sp>
+        <p:nvSpPr>
+          <p:cNvPr id="11" name="Shape 9"/>
+          <p:cNvSpPr/>
+          <p:nvPr/>
+        </p:nvSpPr>
+        <p:spPr>
+          <a:xfrm>
+            <a:off x="457200" y="3118104"/>
+            <a:ext cx="6400800" cy="3145536"/>
+          </a:xfrm>
+          <a:prstGeom prst="roundRect">
+            <a:avLst>
+              <a:gd name="adj" fmla="val 3779"/>
             </a:avLst>
           </a:prstGeom>
           <a:solidFill>
@@ -10717,60 +11024,97 @@
       </p:sp>
       <p:sp>
         <p:nvSpPr>
-          <p:cNvPr id="8" name="Shape 6"/>
-          <p:cNvSpPr/>
-          <p:nvPr/>
-        </p:nvSpPr>
-        <p:spPr>
-          <a:xfrm>
-            <a:off x="640080" y="2331720"/>
-            <a:ext cx="490118" cy="256032"/>
-          </a:xfrm>
-          <a:prstGeom prst="roundRect">
-            <a:avLst>
-              <a:gd name="adj" fmla="val 50000"/>
-            </a:avLst>
-          </a:prstGeom>
-          <a:solidFill>
-            <a:srgbClr val="8E8E93"/>
-          </a:solidFill>
-          <a:ln/>
-        </p:spPr>
-      </p:sp>
-      <p:sp>
-        <p:nvSpPr>
-          <p:cNvPr id="9" name="Text 7"/>
-          <p:cNvSpPr/>
-          <p:nvPr/>
-        </p:nvSpPr>
-        <p:spPr>
-          <a:xfrm>
-            <a:off x="640080" y="2331720"/>
-            <a:ext cx="490118" cy="256032"/>
-          </a:xfrm>
-          <a:prstGeom prst="rect">
-            <a:avLst/>
-          </a:prstGeom>
-          <a:noFill/>
-          <a:ln/>
-        </p:spPr>
-        <p:txBody>
-          <a:bodyPr wrap="square" lIns="0" tIns="0" rIns="0" bIns="0" rtlCol="0" anchor="ctr"/>
-          <a:lstStyle/>
-          <a:p>
-            <a:pPr algn="ctr" indent="0" marL="0">
-              <a:buNone/>
-            </a:pPr>
-            <a:r>
-              <a:rPr lang="en-US" sz="950" dirty="0">
-                <a:solidFill>
-                  <a:srgbClr val="FFFFFF"/>
+          <p:cNvPr id="12" name="Text 10"/>
+          <p:cNvSpPr/>
+          <p:nvPr/>
+        </p:nvSpPr>
+        <p:spPr>
+          <a:xfrm>
+            <a:off x="676656" y="3255264"/>
+            <a:ext cx="5961888" cy="256032"/>
+          </a:xfrm>
+          <a:prstGeom prst="rect">
+            <a:avLst/>
+          </a:prstGeom>
+          <a:noFill/>
+          <a:ln/>
+        </p:spPr>
+        <p:txBody>
+          <a:bodyPr wrap="square" lIns="0" tIns="0" rIns="0" bIns="0" rtlCol="0" anchor="ctr"/>
+          <a:lstStyle/>
+          <a:p>
+            <a:pPr indent="0" marL="0">
+              <a:buNone/>
+            </a:pPr>
+            <a:r>
+              <a:rPr lang="en-US" sz="1200" dirty="0">
+                <a:solidFill>
+                  <a:srgbClr val="222222"/>
                 </a:solidFill>
                 <a:latin typeface="Paperlogy 6 SemiBold" pitchFamily="34" charset="0"/>
                 <a:ea typeface="Paperlogy 6 SemiBold" pitchFamily="34" charset="-122"/>
                 <a:cs typeface="Paperlogy 6 SemiBold" pitchFamily="34" charset="-120"/>
               </a:rPr>
-              <a:t>무엇을</a:t>
+              <a:t>공개 SWE-bench 결과 — 단발 생성(에이전트 스캐폴드 없음)</a:t>
+            </a:r>
+            <a:endParaRPr lang="en-US" sz="1200" dirty="0"/>
+          </a:p>
+        </p:txBody>
+      </p:sp>
+      <p:sp>
+        <p:nvSpPr>
+          <p:cNvPr id="13" name="Shape 11"/>
+          <p:cNvSpPr/>
+          <p:nvPr/>
+        </p:nvSpPr>
+        <p:spPr>
+          <a:xfrm>
+            <a:off x="676656" y="3557016"/>
+            <a:ext cx="5961888" cy="365760"/>
+          </a:xfrm>
+          <a:prstGeom prst="rect">
+            <a:avLst/>
+          </a:prstGeom>
+          <a:solidFill>
+            <a:srgbClr val="F2F3F5"/>
+          </a:solidFill>
+          <a:ln/>
+        </p:spPr>
+      </p:sp>
+      <p:sp>
+        <p:nvSpPr>
+          <p:cNvPr id="14" name="Text 12"/>
+          <p:cNvSpPr/>
+          <p:nvPr/>
+        </p:nvSpPr>
+        <p:spPr>
+          <a:xfrm>
+            <a:off x="749808" y="3557016"/>
+            <a:ext cx="2377440" cy="365760"/>
+          </a:xfrm>
+          <a:prstGeom prst="rect">
+            <a:avLst/>
+          </a:prstGeom>
+          <a:noFill/>
+          <a:ln/>
+        </p:spPr>
+        <p:txBody>
+          <a:bodyPr wrap="square" lIns="0" tIns="0" rIns="0" bIns="0" rtlCol="0" anchor="ctr"/>
+          <a:lstStyle/>
+          <a:p>
+            <a:pPr algn="l" indent="0" marL="0">
+              <a:buNone/>
+            </a:pPr>
+            <a:r>
+              <a:rPr lang="en-US" sz="950" dirty="0">
+                <a:solidFill>
+                  <a:srgbClr val="222222"/>
+                </a:solidFill>
+                <a:latin typeface="Paperlogy 6 SemiBold" pitchFamily="34" charset="0"/>
+                <a:ea typeface="Paperlogy 6 SemiBold" pitchFamily="34" charset="-122"/>
+                <a:cs typeface="Paperlogy 6 SemiBold" pitchFamily="34" charset="-120"/>
+              </a:rPr>
+              <a:t>모델 (규모)</a:t>
             </a:r>
             <a:endParaRPr lang="en-US" sz="950" dirty="0"/>
           </a:p>
@@ -10778,33 +11122,213 @@
       </p:sp>
       <p:sp>
         <p:nvSpPr>
-          <p:cNvPr id="10" name="Text 8"/>
-          <p:cNvSpPr/>
-          <p:nvPr/>
-        </p:nvSpPr>
-        <p:spPr>
-          <a:xfrm>
-            <a:off x="640080" y="2642616"/>
-            <a:ext cx="3271418" cy="530352"/>
-          </a:xfrm>
-          <a:prstGeom prst="rect">
-            <a:avLst/>
-          </a:prstGeom>
-          <a:noFill/>
-          <a:ln/>
-        </p:spPr>
-        <p:txBody>
-          <a:bodyPr wrap="square" lIns="0" tIns="0" rIns="0" bIns="0" rtlCol="0" anchor="ctr"/>
-          <a:lstStyle/>
-          <a:p>
-            <a:pPr indent="0" marL="0">
-              <a:lnSpc>
-                <a:spcPct val="134000"/>
-              </a:lnSpc>
-              <a:buNone/>
-            </a:pPr>
-            <a:r>
-              <a:rPr lang="en-US" sz="980" dirty="0">
+          <p:cNvPr id="15" name="Text 13"/>
+          <p:cNvSpPr/>
+          <p:nvPr/>
+        </p:nvSpPr>
+        <p:spPr>
+          <a:xfrm>
+            <a:off x="3218688" y="3557016"/>
+            <a:ext cx="1508760" cy="365760"/>
+          </a:xfrm>
+          <a:prstGeom prst="rect">
+            <a:avLst/>
+          </a:prstGeom>
+          <a:noFill/>
+          <a:ln/>
+        </p:spPr>
+        <p:txBody>
+          <a:bodyPr wrap="square" lIns="0" tIns="0" rIns="0" bIns="0" rtlCol="0" anchor="ctr"/>
+          <a:lstStyle/>
+          <a:p>
+            <a:pPr algn="l" indent="0" marL="0">
+              <a:buNone/>
+            </a:pPr>
+            <a:r>
+              <a:rPr lang="en-US" sz="950" dirty="0">
+                <a:solidFill>
+                  <a:srgbClr val="222222"/>
+                </a:solidFill>
+                <a:latin typeface="Paperlogy 6 SemiBold" pitchFamily="34" charset="0"/>
+                <a:ea typeface="Paperlogy 6 SemiBold" pitchFamily="34" charset="-122"/>
+                <a:cs typeface="Paperlogy 6 SemiBold" pitchFamily="34" charset="-120"/>
+              </a:rPr>
+              <a:t>방식</a:t>
+            </a:r>
+            <a:endParaRPr lang="en-US" sz="950" dirty="0"/>
+          </a:p>
+        </p:txBody>
+      </p:sp>
+      <p:sp>
+        <p:nvSpPr>
+          <p:cNvPr id="16" name="Text 14"/>
+          <p:cNvSpPr/>
+          <p:nvPr/>
+        </p:nvSpPr>
+        <p:spPr>
+          <a:xfrm>
+            <a:off x="4818888" y="3557016"/>
+            <a:ext cx="1069848" cy="365760"/>
+          </a:xfrm>
+          <a:prstGeom prst="rect">
+            <a:avLst/>
+          </a:prstGeom>
+          <a:noFill/>
+          <a:ln/>
+        </p:spPr>
+        <p:txBody>
+          <a:bodyPr wrap="square" lIns="0" tIns="0" rIns="0" bIns="0" rtlCol="0" anchor="ctr"/>
+          <a:lstStyle/>
+          <a:p>
+            <a:pPr algn="l" indent="0" marL="0">
+              <a:buNone/>
+            </a:pPr>
+            <a:r>
+              <a:rPr lang="en-US" sz="950" dirty="0">
+                <a:solidFill>
+                  <a:srgbClr val="222222"/>
+                </a:solidFill>
+                <a:latin typeface="Paperlogy 6 SemiBold" pitchFamily="34" charset="0"/>
+                <a:ea typeface="Paperlogy 6 SemiBold" pitchFamily="34" charset="-122"/>
+                <a:cs typeface="Paperlogy 6 SemiBold" pitchFamily="34" charset="-120"/>
+              </a:rPr>
+              <a:t>벤치 · N</a:t>
+            </a:r>
+            <a:endParaRPr lang="en-US" sz="950" dirty="0"/>
+          </a:p>
+        </p:txBody>
+      </p:sp>
+      <p:sp>
+        <p:nvSpPr>
+          <p:cNvPr id="17" name="Text 15"/>
+          <p:cNvSpPr/>
+          <p:nvPr/>
+        </p:nvSpPr>
+        <p:spPr>
+          <a:xfrm>
+            <a:off x="5980176" y="3557016"/>
+            <a:ext cx="640080" cy="365760"/>
+          </a:xfrm>
+          <a:prstGeom prst="rect">
+            <a:avLst/>
+          </a:prstGeom>
+          <a:noFill/>
+          <a:ln/>
+        </p:spPr>
+        <p:txBody>
+          <a:bodyPr wrap="square" lIns="0" tIns="0" rIns="0" bIns="0" rtlCol="0" anchor="ctr"/>
+          <a:lstStyle/>
+          <a:p>
+            <a:pPr algn="r" indent="0" marL="0">
+              <a:buNone/>
+            </a:pPr>
+            <a:r>
+              <a:rPr lang="en-US" sz="950" dirty="0">
+                <a:solidFill>
+                  <a:srgbClr val="222222"/>
+                </a:solidFill>
+                <a:latin typeface="Paperlogy 6 SemiBold" pitchFamily="34" charset="0"/>
+                <a:ea typeface="Paperlogy 6 SemiBold" pitchFamily="34" charset="-122"/>
+                <a:cs typeface="Paperlogy 6 SemiBold" pitchFamily="34" charset="-120"/>
+              </a:rPr>
+              <a:t>resolved</a:t>
+            </a:r>
+            <a:endParaRPr lang="en-US" sz="950" dirty="0"/>
+          </a:p>
+        </p:txBody>
+      </p:sp>
+      <p:sp>
+        <p:nvSpPr>
+          <p:cNvPr id="18" name="Shape 16"/>
+          <p:cNvSpPr/>
+          <p:nvPr/>
+        </p:nvSpPr>
+        <p:spPr>
+          <a:xfrm>
+            <a:off x="676656" y="3922776"/>
+            <a:ext cx="5961888" cy="365760"/>
+          </a:xfrm>
+          <a:prstGeom prst="roundRect">
+            <a:avLst>
+              <a:gd name="adj" fmla="val 10000"/>
+            </a:avLst>
+          </a:prstGeom>
+          <a:solidFill>
+            <a:srgbClr val="FDEEF7"/>
+          </a:solidFill>
+          <a:ln w="12700">
+            <a:solidFill>
+              <a:srgbClr val="EA5EC1"/>
+            </a:solidFill>
+            <a:prstDash val="solid"/>
+          </a:ln>
+        </p:spPr>
+      </p:sp>
+      <p:sp>
+        <p:nvSpPr>
+          <p:cNvPr id="19" name="Text 17"/>
+          <p:cNvSpPr/>
+          <p:nvPr/>
+        </p:nvSpPr>
+        <p:spPr>
+          <a:xfrm>
+            <a:off x="749808" y="3922776"/>
+            <a:ext cx="2377440" cy="365760"/>
+          </a:xfrm>
+          <a:prstGeom prst="rect">
+            <a:avLst/>
+          </a:prstGeom>
+          <a:noFill/>
+          <a:ln/>
+        </p:spPr>
+        <p:txBody>
+          <a:bodyPr wrap="square" lIns="0" tIns="0" rIns="0" bIns="0" rtlCol="0" anchor="ctr"/>
+          <a:lstStyle/>
+          <a:p>
+            <a:pPr algn="l" indent="0" marL="0">
+              <a:buNone/>
+            </a:pPr>
+            <a:r>
+              <a:rPr lang="en-US" sz="900" dirty="0">
+                <a:solidFill>
+                  <a:srgbClr val="222222"/>
+                </a:solidFill>
+                <a:latin typeface="Paperlogy 7 Bold" pitchFamily="34" charset="0"/>
+                <a:ea typeface="Paperlogy 7 Bold" pitchFamily="34" charset="-122"/>
+                <a:cs typeface="Paperlogy 7 Bold" pitchFamily="34" charset="-120"/>
+              </a:rPr>
+              <a:t>Llama-3.1-8B-Instruct ·8B</a:t>
+            </a:r>
+            <a:endParaRPr lang="en-US" sz="900" dirty="0"/>
+          </a:p>
+        </p:txBody>
+      </p:sp>
+      <p:sp>
+        <p:nvSpPr>
+          <p:cNvPr id="20" name="Text 18"/>
+          <p:cNvSpPr/>
+          <p:nvPr/>
+        </p:nvSpPr>
+        <p:spPr>
+          <a:xfrm>
+            <a:off x="3218688" y="3922776"/>
+            <a:ext cx="1508760" cy="365760"/>
+          </a:xfrm>
+          <a:prstGeom prst="rect">
+            <a:avLst/>
+          </a:prstGeom>
+          <a:noFill/>
+          <a:ln/>
+        </p:spPr>
+        <p:txBody>
+          <a:bodyPr wrap="square" lIns="0" tIns="0" rIns="0" bIns="0" rtlCol="0" anchor="ctr"/>
+          <a:lstStyle/>
+          <a:p>
+            <a:pPr algn="l" indent="0" marL="0">
+              <a:buNone/>
+            </a:pPr>
+            <a:r>
+              <a:rPr lang="en-US" sz="930" dirty="0">
                 <a:solidFill>
                   <a:srgbClr val="45515E"/>
                 </a:solidFill>
@@ -10812,26 +11336,810 @@
                 <a:ea typeface="Paperlogy 4 Regular" pitchFamily="34" charset="-122"/>
                 <a:cs typeface="Paperlogy 4 Regular" pitchFamily="34" charset="-120"/>
               </a:rPr>
-              <a:t>임베딩/리랭킹 처리량 — SWE-bench 검색 보조에 쓰이는 모델.</a:t>
-            </a:r>
-            <a:endParaRPr lang="en-US" sz="980" dirty="0"/>
-          </a:p>
-        </p:txBody>
-      </p:sp>
-      <p:sp>
-        <p:nvSpPr>
-          <p:cNvPr id="11" name="Shape 9"/>
-          <p:cNvSpPr/>
-          <p:nvPr/>
-        </p:nvSpPr>
-        <p:spPr>
-          <a:xfrm>
-            <a:off x="4277258" y="2185416"/>
-            <a:ext cx="3637178" cy="1097280"/>
+              <a:t>oracle · single-shot</a:t>
+            </a:r>
+            <a:endParaRPr lang="en-US" sz="930" dirty="0"/>
+          </a:p>
+        </p:txBody>
+      </p:sp>
+      <p:sp>
+        <p:nvSpPr>
+          <p:cNvPr id="21" name="Text 19"/>
+          <p:cNvSpPr/>
+          <p:nvPr/>
+        </p:nvSpPr>
+        <p:spPr>
+          <a:xfrm>
+            <a:off x="4818888" y="3922776"/>
+            <a:ext cx="1069848" cy="365760"/>
+          </a:xfrm>
+          <a:prstGeom prst="rect">
+            <a:avLst/>
+          </a:prstGeom>
+          <a:noFill/>
+          <a:ln/>
+        </p:spPr>
+        <p:txBody>
+          <a:bodyPr wrap="square" lIns="0" tIns="0" rIns="0" bIns="0" rtlCol="0" anchor="ctr"/>
+          <a:lstStyle/>
+          <a:p>
+            <a:pPr algn="l" indent="0" marL="0">
+              <a:buNone/>
+            </a:pPr>
+            <a:r>
+              <a:rPr lang="en-US" sz="930" dirty="0">
+                <a:solidFill>
+                  <a:srgbClr val="45515E"/>
+                </a:solidFill>
+                <a:latin typeface="Paperlogy 4 Regular" pitchFamily="34" charset="0"/>
+                <a:ea typeface="Paperlogy 4 Regular" pitchFamily="34" charset="-122"/>
+                <a:cs typeface="Paperlogy 4 Regular" pitchFamily="34" charset="-120"/>
+              </a:rPr>
+              <a:t>Lite · 50</a:t>
+            </a:r>
+            <a:endParaRPr lang="en-US" sz="930" dirty="0"/>
+          </a:p>
+        </p:txBody>
+      </p:sp>
+      <p:sp>
+        <p:nvSpPr>
+          <p:cNvPr id="22" name="Text 20"/>
+          <p:cNvSpPr/>
+          <p:nvPr/>
+        </p:nvSpPr>
+        <p:spPr>
+          <a:xfrm>
+            <a:off x="5980176" y="3922776"/>
+            <a:ext cx="640080" cy="365760"/>
+          </a:xfrm>
+          <a:prstGeom prst="rect">
+            <a:avLst/>
+          </a:prstGeom>
+          <a:noFill/>
+          <a:ln/>
+        </p:spPr>
+        <p:txBody>
+          <a:bodyPr wrap="square" lIns="0" tIns="0" rIns="0" bIns="0" rtlCol="0" anchor="ctr"/>
+          <a:lstStyle/>
+          <a:p>
+            <a:pPr algn="r" indent="0" marL="0">
+              <a:buNone/>
+            </a:pPr>
+            <a:r>
+              <a:rPr lang="en-US" sz="930" dirty="0">
+                <a:solidFill>
+                  <a:srgbClr val="EA5EC1"/>
+                </a:solidFill>
+                <a:latin typeface="Paperlogy 7 Bold" pitchFamily="34" charset="0"/>
+                <a:ea typeface="Paperlogy 7 Bold" pitchFamily="34" charset="-122"/>
+                <a:cs typeface="Paperlogy 7 Bold" pitchFamily="34" charset="-120"/>
+              </a:rPr>
+              <a:t>0 %</a:t>
+            </a:r>
+            <a:endParaRPr lang="en-US" sz="930" dirty="0"/>
+          </a:p>
+        </p:txBody>
+      </p:sp>
+      <p:sp>
+        <p:nvSpPr>
+          <p:cNvPr id="23" name="Text 21"/>
+          <p:cNvSpPr/>
+          <p:nvPr/>
+        </p:nvSpPr>
+        <p:spPr>
+          <a:xfrm>
+            <a:off x="749808" y="4288536"/>
+            <a:ext cx="2377440" cy="365760"/>
+          </a:xfrm>
+          <a:prstGeom prst="rect">
+            <a:avLst/>
+          </a:prstGeom>
+          <a:noFill/>
+          <a:ln/>
+        </p:spPr>
+        <p:txBody>
+          <a:bodyPr wrap="square" lIns="0" tIns="0" rIns="0" bIns="0" rtlCol="0" anchor="ctr"/>
+          <a:lstStyle/>
+          <a:p>
+            <a:pPr algn="l" indent="0" marL="0">
+              <a:buNone/>
+            </a:pPr>
+            <a:r>
+              <a:rPr lang="en-US" sz="900" dirty="0">
+                <a:solidFill>
+                  <a:srgbClr val="222222"/>
+                </a:solidFill>
+                <a:latin typeface="Paperlogy 7 Bold" pitchFamily="34" charset="0"/>
+                <a:ea typeface="Paperlogy 7 Bold" pitchFamily="34" charset="-122"/>
+                <a:cs typeface="Paperlogy 7 Bold" pitchFamily="34" charset="-120"/>
+              </a:rPr>
+              <a:t>SWE-Llama-13B ·13B †</a:t>
+            </a:r>
+            <a:endParaRPr lang="en-US" sz="900" dirty="0"/>
+          </a:p>
+        </p:txBody>
+      </p:sp>
+      <p:sp>
+        <p:nvSpPr>
+          <p:cNvPr id="24" name="Text 22"/>
+          <p:cNvSpPr/>
+          <p:nvPr/>
+        </p:nvSpPr>
+        <p:spPr>
+          <a:xfrm>
+            <a:off x="3218688" y="4288536"/>
+            <a:ext cx="1508760" cy="365760"/>
+          </a:xfrm>
+          <a:prstGeom prst="rect">
+            <a:avLst/>
+          </a:prstGeom>
+          <a:noFill/>
+          <a:ln/>
+        </p:spPr>
+        <p:txBody>
+          <a:bodyPr wrap="square" lIns="0" tIns="0" rIns="0" bIns="0" rtlCol="0" anchor="ctr"/>
+          <a:lstStyle/>
+          <a:p>
+            <a:pPr algn="l" indent="0" marL="0">
+              <a:buNone/>
+            </a:pPr>
+            <a:r>
+              <a:rPr lang="en-US" sz="930" dirty="0">
+                <a:solidFill>
+                  <a:srgbClr val="45515E"/>
+                </a:solidFill>
+                <a:latin typeface="Paperlogy 4 Regular" pitchFamily="34" charset="0"/>
+                <a:ea typeface="Paperlogy 4 Regular" pitchFamily="34" charset="-122"/>
+                <a:cs typeface="Paperlogy 4 Regular" pitchFamily="34" charset="-120"/>
+              </a:rPr>
+              <a:t>RAG · single-shot</a:t>
+            </a:r>
+            <a:endParaRPr lang="en-US" sz="930" dirty="0"/>
+          </a:p>
+        </p:txBody>
+      </p:sp>
+      <p:sp>
+        <p:nvSpPr>
+          <p:cNvPr id="25" name="Text 23"/>
+          <p:cNvSpPr/>
+          <p:nvPr/>
+        </p:nvSpPr>
+        <p:spPr>
+          <a:xfrm>
+            <a:off x="4818888" y="4288536"/>
+            <a:ext cx="1069848" cy="365760"/>
+          </a:xfrm>
+          <a:prstGeom prst="rect">
+            <a:avLst/>
+          </a:prstGeom>
+          <a:noFill/>
+          <a:ln/>
+        </p:spPr>
+        <p:txBody>
+          <a:bodyPr wrap="square" lIns="0" tIns="0" rIns="0" bIns="0" rtlCol="0" anchor="ctr"/>
+          <a:lstStyle/>
+          <a:p>
+            <a:pPr algn="l" indent="0" marL="0">
+              <a:buNone/>
+            </a:pPr>
+            <a:r>
+              <a:rPr lang="en-US" sz="930" dirty="0">
+                <a:solidFill>
+                  <a:srgbClr val="45515E"/>
+                </a:solidFill>
+                <a:latin typeface="Paperlogy 4 Regular" pitchFamily="34" charset="0"/>
+                <a:ea typeface="Paperlogy 4 Regular" pitchFamily="34" charset="-122"/>
+                <a:cs typeface="Paperlogy 4 Regular" pitchFamily="34" charset="-120"/>
+              </a:rPr>
+              <a:t>Lite · 300</a:t>
+            </a:r>
+            <a:endParaRPr lang="en-US" sz="930" dirty="0"/>
+          </a:p>
+        </p:txBody>
+      </p:sp>
+      <p:sp>
+        <p:nvSpPr>
+          <p:cNvPr id="26" name="Text 24"/>
+          <p:cNvSpPr/>
+          <p:nvPr/>
+        </p:nvSpPr>
+        <p:spPr>
+          <a:xfrm>
+            <a:off x="5980176" y="4288536"/>
+            <a:ext cx="640080" cy="365760"/>
+          </a:xfrm>
+          <a:prstGeom prst="rect">
+            <a:avLst/>
+          </a:prstGeom>
+          <a:noFill/>
+          <a:ln/>
+        </p:spPr>
+        <p:txBody>
+          <a:bodyPr wrap="square" lIns="0" tIns="0" rIns="0" bIns="0" rtlCol="0" anchor="ctr"/>
+          <a:lstStyle/>
+          <a:p>
+            <a:pPr algn="r" indent="0" marL="0">
+              <a:buNone/>
+            </a:pPr>
+            <a:r>
+              <a:rPr lang="en-US" sz="930" dirty="0">
+                <a:solidFill>
+                  <a:srgbClr val="1456F0"/>
+                </a:solidFill>
+                <a:latin typeface="Paperlogy 7 Bold" pitchFamily="34" charset="0"/>
+                <a:ea typeface="Paperlogy 7 Bold" pitchFamily="34" charset="-122"/>
+                <a:cs typeface="Paperlogy 7 Bold" pitchFamily="34" charset="-120"/>
+              </a:rPr>
+              <a:t>1.0 %</a:t>
+            </a:r>
+            <a:endParaRPr lang="en-US" sz="930" dirty="0"/>
+          </a:p>
+        </p:txBody>
+      </p:sp>
+      <p:sp>
+        <p:nvSpPr>
+          <p:cNvPr id="27" name="Shape 25"/>
+          <p:cNvSpPr/>
+          <p:nvPr/>
+        </p:nvSpPr>
+        <p:spPr>
+          <a:xfrm>
+            <a:off x="676656" y="4654296"/>
+            <a:ext cx="5961888" cy="365760"/>
+          </a:xfrm>
+          <a:prstGeom prst="rect">
+            <a:avLst/>
+          </a:prstGeom>
+          <a:solidFill>
+            <a:srgbClr val="FAFAFA"/>
+          </a:solidFill>
+          <a:ln/>
+        </p:spPr>
+      </p:sp>
+      <p:sp>
+        <p:nvSpPr>
+          <p:cNvPr id="28" name="Text 26"/>
+          <p:cNvSpPr/>
+          <p:nvPr/>
+        </p:nvSpPr>
+        <p:spPr>
+          <a:xfrm>
+            <a:off x="749808" y="4654296"/>
+            <a:ext cx="2377440" cy="365760"/>
+          </a:xfrm>
+          <a:prstGeom prst="rect">
+            <a:avLst/>
+          </a:prstGeom>
+          <a:noFill/>
+          <a:ln/>
+        </p:spPr>
+        <p:txBody>
+          <a:bodyPr wrap="square" lIns="0" tIns="0" rIns="0" bIns="0" rtlCol="0" anchor="ctr"/>
+          <a:lstStyle/>
+          <a:p>
+            <a:pPr algn="l" indent="0" marL="0">
+              <a:buNone/>
+            </a:pPr>
+            <a:r>
+              <a:rPr lang="en-US" sz="900" dirty="0">
+                <a:solidFill>
+                  <a:srgbClr val="222222"/>
+                </a:solidFill>
+                <a:latin typeface="Paperlogy 7 Bold" pitchFamily="34" charset="0"/>
+                <a:ea typeface="Paperlogy 7 Bold" pitchFamily="34" charset="-122"/>
+                <a:cs typeface="Paperlogy 7 Bold" pitchFamily="34" charset="-120"/>
+              </a:rPr>
+              <a:t>GPT-4 ·프런티어</a:t>
+            </a:r>
+            <a:endParaRPr lang="en-US" sz="900" dirty="0"/>
+          </a:p>
+        </p:txBody>
+      </p:sp>
+      <p:sp>
+        <p:nvSpPr>
+          <p:cNvPr id="29" name="Text 27"/>
+          <p:cNvSpPr/>
+          <p:nvPr/>
+        </p:nvSpPr>
+        <p:spPr>
+          <a:xfrm>
+            <a:off x="3218688" y="4654296"/>
+            <a:ext cx="1508760" cy="365760"/>
+          </a:xfrm>
+          <a:prstGeom prst="rect">
+            <a:avLst/>
+          </a:prstGeom>
+          <a:noFill/>
+          <a:ln/>
+        </p:spPr>
+        <p:txBody>
+          <a:bodyPr wrap="square" lIns="0" tIns="0" rIns="0" bIns="0" rtlCol="0" anchor="ctr"/>
+          <a:lstStyle/>
+          <a:p>
+            <a:pPr algn="l" indent="0" marL="0">
+              <a:buNone/>
+            </a:pPr>
+            <a:r>
+              <a:rPr lang="en-US" sz="930" dirty="0">
+                <a:solidFill>
+                  <a:srgbClr val="45515E"/>
+                </a:solidFill>
+                <a:latin typeface="Paperlogy 4 Regular" pitchFamily="34" charset="0"/>
+                <a:ea typeface="Paperlogy 4 Regular" pitchFamily="34" charset="-122"/>
+                <a:cs typeface="Paperlogy 4 Regular" pitchFamily="34" charset="-120"/>
+              </a:rPr>
+              <a:t>oracle · single-shot</a:t>
+            </a:r>
+            <a:endParaRPr lang="en-US" sz="930" dirty="0"/>
+          </a:p>
+        </p:txBody>
+      </p:sp>
+      <p:sp>
+        <p:nvSpPr>
+          <p:cNvPr id="30" name="Text 28"/>
+          <p:cNvSpPr/>
+          <p:nvPr/>
+        </p:nvSpPr>
+        <p:spPr>
+          <a:xfrm>
+            <a:off x="4818888" y="4654296"/>
+            <a:ext cx="1069848" cy="365760"/>
+          </a:xfrm>
+          <a:prstGeom prst="rect">
+            <a:avLst/>
+          </a:prstGeom>
+          <a:noFill/>
+          <a:ln/>
+        </p:spPr>
+        <p:txBody>
+          <a:bodyPr wrap="square" lIns="0" tIns="0" rIns="0" bIns="0" rtlCol="0" anchor="ctr"/>
+          <a:lstStyle/>
+          <a:p>
+            <a:pPr algn="l" indent="0" marL="0">
+              <a:buNone/>
+            </a:pPr>
+            <a:r>
+              <a:rPr lang="en-US" sz="930" dirty="0">
+                <a:solidFill>
+                  <a:srgbClr val="45515E"/>
+                </a:solidFill>
+                <a:latin typeface="Paperlogy 4 Regular" pitchFamily="34" charset="0"/>
+                <a:ea typeface="Paperlogy 4 Regular" pitchFamily="34" charset="-122"/>
+                <a:cs typeface="Paperlogy 4 Regular" pitchFamily="34" charset="-120"/>
+              </a:rPr>
+              <a:t>full · 2294</a:t>
+            </a:r>
+            <a:endParaRPr lang="en-US" sz="930" dirty="0"/>
+          </a:p>
+        </p:txBody>
+      </p:sp>
+      <p:sp>
+        <p:nvSpPr>
+          <p:cNvPr id="31" name="Text 29"/>
+          <p:cNvSpPr/>
+          <p:nvPr/>
+        </p:nvSpPr>
+        <p:spPr>
+          <a:xfrm>
+            <a:off x="5980176" y="4654296"/>
+            <a:ext cx="640080" cy="365760"/>
+          </a:xfrm>
+          <a:prstGeom prst="rect">
+            <a:avLst/>
+          </a:prstGeom>
+          <a:noFill/>
+          <a:ln/>
+        </p:spPr>
+        <p:txBody>
+          <a:bodyPr wrap="square" lIns="0" tIns="0" rIns="0" bIns="0" rtlCol="0" anchor="ctr"/>
+          <a:lstStyle/>
+          <a:p>
+            <a:pPr algn="r" indent="0" marL="0">
+              <a:buNone/>
+            </a:pPr>
+            <a:r>
+              <a:rPr lang="en-US" sz="930" dirty="0">
+                <a:solidFill>
+                  <a:srgbClr val="1456F0"/>
+                </a:solidFill>
+                <a:latin typeface="Paperlogy 7 Bold" pitchFamily="34" charset="0"/>
+                <a:ea typeface="Paperlogy 7 Bold" pitchFamily="34" charset="-122"/>
+                <a:cs typeface="Paperlogy 7 Bold" pitchFamily="34" charset="-120"/>
+              </a:rPr>
+              <a:t>1.7 %</a:t>
+            </a:r>
+            <a:endParaRPr lang="en-US" sz="930" dirty="0"/>
+          </a:p>
+        </p:txBody>
+      </p:sp>
+      <p:sp>
+        <p:nvSpPr>
+          <p:cNvPr id="32" name="Text 30"/>
+          <p:cNvSpPr/>
+          <p:nvPr/>
+        </p:nvSpPr>
+        <p:spPr>
+          <a:xfrm>
+            <a:off x="749808" y="5020056"/>
+            <a:ext cx="2377440" cy="365760"/>
+          </a:xfrm>
+          <a:prstGeom prst="rect">
+            <a:avLst/>
+          </a:prstGeom>
+          <a:noFill/>
+          <a:ln/>
+        </p:spPr>
+        <p:txBody>
+          <a:bodyPr wrap="square" lIns="0" tIns="0" rIns="0" bIns="0" rtlCol="0" anchor="ctr"/>
+          <a:lstStyle/>
+          <a:p>
+            <a:pPr algn="l" indent="0" marL="0">
+              <a:buNone/>
+            </a:pPr>
+            <a:r>
+              <a:rPr lang="en-US" sz="900" dirty="0">
+                <a:solidFill>
+                  <a:srgbClr val="222222"/>
+                </a:solidFill>
+                <a:latin typeface="Paperlogy 7 Bold" pitchFamily="34" charset="0"/>
+                <a:ea typeface="Paperlogy 7 Bold" pitchFamily="34" charset="-122"/>
+                <a:cs typeface="Paperlogy 7 Bold" pitchFamily="34" charset="-120"/>
+              </a:rPr>
+              <a:t>Claude 2 ·프런티어</a:t>
+            </a:r>
+            <a:endParaRPr lang="en-US" sz="900" dirty="0"/>
+          </a:p>
+        </p:txBody>
+      </p:sp>
+      <p:sp>
+        <p:nvSpPr>
+          <p:cNvPr id="33" name="Text 31"/>
+          <p:cNvSpPr/>
+          <p:nvPr/>
+        </p:nvSpPr>
+        <p:spPr>
+          <a:xfrm>
+            <a:off x="3218688" y="5020056"/>
+            <a:ext cx="1508760" cy="365760"/>
+          </a:xfrm>
+          <a:prstGeom prst="rect">
+            <a:avLst/>
+          </a:prstGeom>
+          <a:noFill/>
+          <a:ln/>
+        </p:spPr>
+        <p:txBody>
+          <a:bodyPr wrap="square" lIns="0" tIns="0" rIns="0" bIns="0" rtlCol="0" anchor="ctr"/>
+          <a:lstStyle/>
+          <a:p>
+            <a:pPr algn="l" indent="0" marL="0">
+              <a:buNone/>
+            </a:pPr>
+            <a:r>
+              <a:rPr lang="en-US" sz="930" dirty="0">
+                <a:solidFill>
+                  <a:srgbClr val="45515E"/>
+                </a:solidFill>
+                <a:latin typeface="Paperlogy 4 Regular" pitchFamily="34" charset="0"/>
+                <a:ea typeface="Paperlogy 4 Regular" pitchFamily="34" charset="-122"/>
+                <a:cs typeface="Paperlogy 4 Regular" pitchFamily="34" charset="-120"/>
+              </a:rPr>
+              <a:t>oracle · single-shot</a:t>
+            </a:r>
+            <a:endParaRPr lang="en-US" sz="930" dirty="0"/>
+          </a:p>
+        </p:txBody>
+      </p:sp>
+      <p:sp>
+        <p:nvSpPr>
+          <p:cNvPr id="34" name="Text 32"/>
+          <p:cNvSpPr/>
+          <p:nvPr/>
+        </p:nvSpPr>
+        <p:spPr>
+          <a:xfrm>
+            <a:off x="4818888" y="5020056"/>
+            <a:ext cx="1069848" cy="365760"/>
+          </a:xfrm>
+          <a:prstGeom prst="rect">
+            <a:avLst/>
+          </a:prstGeom>
+          <a:noFill/>
+          <a:ln/>
+        </p:spPr>
+        <p:txBody>
+          <a:bodyPr wrap="square" lIns="0" tIns="0" rIns="0" bIns="0" rtlCol="0" anchor="ctr"/>
+          <a:lstStyle/>
+          <a:p>
+            <a:pPr algn="l" indent="0" marL="0">
+              <a:buNone/>
+            </a:pPr>
+            <a:r>
+              <a:rPr lang="en-US" sz="930" dirty="0">
+                <a:solidFill>
+                  <a:srgbClr val="45515E"/>
+                </a:solidFill>
+                <a:latin typeface="Paperlogy 4 Regular" pitchFamily="34" charset="0"/>
+                <a:ea typeface="Paperlogy 4 Regular" pitchFamily="34" charset="-122"/>
+                <a:cs typeface="Paperlogy 4 Regular" pitchFamily="34" charset="-120"/>
+              </a:rPr>
+              <a:t>full · 2294</a:t>
+            </a:r>
+            <a:endParaRPr lang="en-US" sz="930" dirty="0"/>
+          </a:p>
+        </p:txBody>
+      </p:sp>
+      <p:sp>
+        <p:nvSpPr>
+          <p:cNvPr id="35" name="Text 33"/>
+          <p:cNvSpPr/>
+          <p:nvPr/>
+        </p:nvSpPr>
+        <p:spPr>
+          <a:xfrm>
+            <a:off x="5980176" y="5020056"/>
+            <a:ext cx="640080" cy="365760"/>
+          </a:xfrm>
+          <a:prstGeom prst="rect">
+            <a:avLst/>
+          </a:prstGeom>
+          <a:noFill/>
+          <a:ln/>
+        </p:spPr>
+        <p:txBody>
+          <a:bodyPr wrap="square" lIns="0" tIns="0" rIns="0" bIns="0" rtlCol="0" anchor="ctr"/>
+          <a:lstStyle/>
+          <a:p>
+            <a:pPr algn="r" indent="0" marL="0">
+              <a:buNone/>
+            </a:pPr>
+            <a:r>
+              <a:rPr lang="en-US" sz="930" dirty="0">
+                <a:solidFill>
+                  <a:srgbClr val="1456F0"/>
+                </a:solidFill>
+                <a:latin typeface="Paperlogy 7 Bold" pitchFamily="34" charset="0"/>
+                <a:ea typeface="Paperlogy 7 Bold" pitchFamily="34" charset="-122"/>
+                <a:cs typeface="Paperlogy 7 Bold" pitchFamily="34" charset="-120"/>
+              </a:rPr>
+              <a:t>4.8 %</a:t>
+            </a:r>
+            <a:endParaRPr lang="en-US" sz="930" dirty="0"/>
+          </a:p>
+        </p:txBody>
+      </p:sp>
+      <p:sp>
+        <p:nvSpPr>
+          <p:cNvPr id="36" name="Shape 34"/>
+          <p:cNvSpPr/>
+          <p:nvPr/>
+        </p:nvSpPr>
+        <p:spPr>
+          <a:xfrm>
+            <a:off x="676656" y="5385816"/>
+            <a:ext cx="5961888" cy="365760"/>
+          </a:xfrm>
+          <a:prstGeom prst="rect">
+            <a:avLst/>
+          </a:prstGeom>
+          <a:solidFill>
+            <a:srgbClr val="FAFAFA"/>
+          </a:solidFill>
+          <a:ln/>
+        </p:spPr>
+      </p:sp>
+      <p:sp>
+        <p:nvSpPr>
+          <p:cNvPr id="37" name="Text 35"/>
+          <p:cNvSpPr/>
+          <p:nvPr/>
+        </p:nvSpPr>
+        <p:spPr>
+          <a:xfrm>
+            <a:off x="749808" y="5385816"/>
+            <a:ext cx="2377440" cy="365760"/>
+          </a:xfrm>
+          <a:prstGeom prst="rect">
+            <a:avLst/>
+          </a:prstGeom>
+          <a:noFill/>
+          <a:ln/>
+        </p:spPr>
+        <p:txBody>
+          <a:bodyPr wrap="square" lIns="0" tIns="0" rIns="0" bIns="0" rtlCol="0" anchor="ctr"/>
+          <a:lstStyle/>
+          <a:p>
+            <a:pPr algn="l" indent="0" marL="0">
+              <a:buNone/>
+            </a:pPr>
+            <a:r>
+              <a:rPr lang="en-US" sz="900" dirty="0">
+                <a:solidFill>
+                  <a:srgbClr val="222222"/>
+                </a:solidFill>
+                <a:latin typeface="Paperlogy 7 Bold" pitchFamily="34" charset="0"/>
+                <a:ea typeface="Paperlogy 7 Bold" pitchFamily="34" charset="-122"/>
+                <a:cs typeface="Paperlogy 7 Bold" pitchFamily="34" charset="-120"/>
+              </a:rPr>
+              <a:t>Llama-3.3-70B-Instruct ·70B</a:t>
+            </a:r>
+            <a:endParaRPr lang="en-US" sz="900" dirty="0"/>
+          </a:p>
+        </p:txBody>
+      </p:sp>
+      <p:sp>
+        <p:nvSpPr>
+          <p:cNvPr id="38" name="Text 36"/>
+          <p:cNvSpPr/>
+          <p:nvPr/>
+        </p:nvSpPr>
+        <p:spPr>
+          <a:xfrm>
+            <a:off x="3218688" y="5385816"/>
+            <a:ext cx="1508760" cy="365760"/>
+          </a:xfrm>
+          <a:prstGeom prst="rect">
+            <a:avLst/>
+          </a:prstGeom>
+          <a:noFill/>
+          <a:ln/>
+        </p:spPr>
+        <p:txBody>
+          <a:bodyPr wrap="square" lIns="0" tIns="0" rIns="0" bIns="0" rtlCol="0" anchor="ctr"/>
+          <a:lstStyle/>
+          <a:p>
+            <a:pPr algn="l" indent="0" marL="0">
+              <a:buNone/>
+            </a:pPr>
+            <a:r>
+              <a:rPr lang="en-US" sz="930" dirty="0">
+                <a:solidFill>
+                  <a:srgbClr val="45515E"/>
+                </a:solidFill>
+                <a:latin typeface="Paperlogy 4 Regular" pitchFamily="34" charset="0"/>
+                <a:ea typeface="Paperlogy 4 Regular" pitchFamily="34" charset="-122"/>
+                <a:cs typeface="Paperlogy 4 Regular" pitchFamily="34" charset="-120"/>
+              </a:rPr>
+              <a:t>oracle 수리 · greedy</a:t>
+            </a:r>
+            <a:endParaRPr lang="en-US" sz="930" dirty="0"/>
+          </a:p>
+        </p:txBody>
+      </p:sp>
+      <p:sp>
+        <p:nvSpPr>
+          <p:cNvPr id="39" name="Text 37"/>
+          <p:cNvSpPr/>
+          <p:nvPr/>
+        </p:nvSpPr>
+        <p:spPr>
+          <a:xfrm>
+            <a:off x="4818888" y="5385816"/>
+            <a:ext cx="1069848" cy="365760"/>
+          </a:xfrm>
+          <a:prstGeom prst="rect">
+            <a:avLst/>
+          </a:prstGeom>
+          <a:noFill/>
+          <a:ln/>
+        </p:spPr>
+        <p:txBody>
+          <a:bodyPr wrap="square" lIns="0" tIns="0" rIns="0" bIns="0" rtlCol="0" anchor="ctr"/>
+          <a:lstStyle/>
+          <a:p>
+            <a:pPr algn="l" indent="0" marL="0">
+              <a:buNone/>
+            </a:pPr>
+            <a:r>
+              <a:rPr lang="en-US" sz="930" dirty="0">
+                <a:solidFill>
+                  <a:srgbClr val="45515E"/>
+                </a:solidFill>
+                <a:latin typeface="Paperlogy 4 Regular" pitchFamily="34" charset="0"/>
+                <a:ea typeface="Paperlogy 4 Regular" pitchFamily="34" charset="-122"/>
+                <a:cs typeface="Paperlogy 4 Regular" pitchFamily="34" charset="-120"/>
+              </a:rPr>
+              <a:t>Verified · 500</a:t>
+            </a:r>
+            <a:endParaRPr lang="en-US" sz="930" dirty="0"/>
+          </a:p>
+        </p:txBody>
+      </p:sp>
+      <p:sp>
+        <p:nvSpPr>
+          <p:cNvPr id="40" name="Text 38"/>
+          <p:cNvSpPr/>
+          <p:nvPr/>
+        </p:nvSpPr>
+        <p:spPr>
+          <a:xfrm>
+            <a:off x="5980176" y="5385816"/>
+            <a:ext cx="640080" cy="365760"/>
+          </a:xfrm>
+          <a:prstGeom prst="rect">
+            <a:avLst/>
+          </a:prstGeom>
+          <a:noFill/>
+          <a:ln/>
+        </p:spPr>
+        <p:txBody>
+          <a:bodyPr wrap="square" lIns="0" tIns="0" rIns="0" bIns="0" rtlCol="0" anchor="ctr"/>
+          <a:lstStyle/>
+          <a:p>
+            <a:pPr algn="r" indent="0" marL="0">
+              <a:buNone/>
+            </a:pPr>
+            <a:r>
+              <a:rPr lang="en-US" sz="930" dirty="0">
+                <a:solidFill>
+                  <a:srgbClr val="1456F0"/>
+                </a:solidFill>
+                <a:latin typeface="Paperlogy 7 Bold" pitchFamily="34" charset="0"/>
+                <a:ea typeface="Paperlogy 7 Bold" pitchFamily="34" charset="-122"/>
+                <a:cs typeface="Paperlogy 7 Bold" pitchFamily="34" charset="-120"/>
+              </a:rPr>
+              <a:t>5.4 %</a:t>
+            </a:r>
+            <a:endParaRPr lang="en-US" sz="930" dirty="0"/>
+          </a:p>
+        </p:txBody>
+      </p:sp>
+      <p:sp>
+        <p:nvSpPr>
+          <p:cNvPr id="41" name="Text 39"/>
+          <p:cNvSpPr/>
+          <p:nvPr/>
+        </p:nvSpPr>
+        <p:spPr>
+          <a:xfrm>
+            <a:off x="676656" y="5843016"/>
+            <a:ext cx="5961888" cy="457200"/>
+          </a:xfrm>
+          <a:prstGeom prst="rect">
+            <a:avLst/>
+          </a:prstGeom>
+          <a:noFill/>
+          <a:ln/>
+        </p:spPr>
+        <p:txBody>
+          <a:bodyPr wrap="square" lIns="0" tIns="0" rIns="0" bIns="0" rtlCol="0" anchor="ctr"/>
+          <a:lstStyle/>
+          <a:p>
+            <a:pPr indent="0" marL="0">
+              <a:lnSpc>
+                <a:spcPct val="140000"/>
+              </a:lnSpc>
+              <a:buNone/>
+            </a:pPr>
+            <a:r>
+              <a:rPr lang="en-US" sz="840" dirty="0">
+                <a:solidFill>
+                  <a:srgbClr val="8E8E93"/>
+                </a:solidFill>
+                <a:latin typeface="Paperlogy 4 Regular" pitchFamily="34" charset="0"/>
+                <a:ea typeface="Paperlogy 4 Regular" pitchFamily="34" charset="-122"/>
+                <a:cs typeface="Paperlogy 4 Regular" pitchFamily="34" charset="-120"/>
+              </a:rPr>
+              <a:t>첫 행 = 본 측정(RNGD).  † SWE-Llama = SWE-bench 학습셋에 파인튜닝한 모델.  나머지는 모두 GPU/클라우드 실행 — 출처: SWE-bench(2023)·SWE-Fixer·SWE-RL(Meta) 논문.</a:t>
+            </a:r>
+            <a:endParaRPr lang="en-US" sz="840" dirty="0"/>
+          </a:p>
+        </p:txBody>
+      </p:sp>
+      <p:sp>
+        <p:nvSpPr>
+          <p:cNvPr id="42" name="Shape 40"/>
+          <p:cNvSpPr/>
+          <p:nvPr/>
+        </p:nvSpPr>
+        <p:spPr>
+          <a:xfrm>
+            <a:off x="7077456" y="3118104"/>
+            <a:ext cx="4657039" cy="950976"/>
           </a:xfrm>
           <a:prstGeom prst="roundRect">
             <a:avLst>
-              <a:gd name="adj" fmla="val 10833"/>
+              <a:gd name="adj" fmla="val 12500"/>
             </a:avLst>
           </a:prstGeom>
           <a:solidFill>
@@ -10854,75 +12162,75 @@
       </p:sp>
       <p:sp>
         <p:nvSpPr>
-          <p:cNvPr id="12" name="Shape 10"/>
-          <p:cNvSpPr/>
-          <p:nvPr/>
-        </p:nvSpPr>
-        <p:spPr>
-          <a:xfrm>
-            <a:off x="4460138" y="2331720"/>
-            <a:ext cx="405994" cy="256032"/>
+          <p:cNvPr id="43" name="Shape 41"/>
+          <p:cNvSpPr/>
+          <p:nvPr/>
+        </p:nvSpPr>
+        <p:spPr>
+          <a:xfrm>
+            <a:off x="7077456" y="3264408"/>
+            <a:ext cx="64008" cy="658368"/>
           </a:xfrm>
           <a:prstGeom prst="roundRect">
             <a:avLst>
-              <a:gd name="adj" fmla="val 50000"/>
+              <a:gd name="adj" fmla="val 42857"/>
             </a:avLst>
           </a:prstGeom>
           <a:solidFill>
-            <a:srgbClr val="8E8E93"/>
+            <a:srgbClr val="60A5FA"/>
           </a:solidFill>
           <a:ln/>
         </p:spPr>
       </p:sp>
       <p:sp>
         <p:nvSpPr>
-          <p:cNvPr id="13" name="Text 11"/>
-          <p:cNvSpPr/>
-          <p:nvPr/>
-        </p:nvSpPr>
-        <p:spPr>
-          <a:xfrm>
-            <a:off x="4460138" y="2331720"/>
-            <a:ext cx="405994" cy="256032"/>
-          </a:xfrm>
-          <a:prstGeom prst="rect">
-            <a:avLst/>
-          </a:prstGeom>
-          <a:noFill/>
-          <a:ln/>
-        </p:spPr>
-        <p:txBody>
-          <a:bodyPr wrap="square" lIns="0" tIns="0" rIns="0" bIns="0" rtlCol="0" anchor="ctr"/>
-          <a:lstStyle/>
-          <a:p>
-            <a:pPr algn="ctr" indent="0" marL="0">
-              <a:buNone/>
-            </a:pPr>
-            <a:r>
-              <a:rPr lang="en-US" sz="950" dirty="0">
-                <a:solidFill>
-                  <a:srgbClr val="FFFFFF"/>
-                </a:solidFill>
-                <a:latin typeface="Paperlogy 6 SemiBold" pitchFamily="34" charset="0"/>
-                <a:ea typeface="Paperlogy 6 SemiBold" pitchFamily="34" charset="-122"/>
-                <a:cs typeface="Paperlogy 6 SemiBold" pitchFamily="34" charset="-120"/>
-              </a:rPr>
-              <a:t>입력</a:t>
-            </a:r>
-            <a:endParaRPr lang="en-US" sz="950" dirty="0"/>
-          </a:p>
-        </p:txBody>
-      </p:sp>
-      <p:sp>
-        <p:nvSpPr>
-          <p:cNvPr id="14" name="Text 12"/>
-          <p:cNvSpPr/>
-          <p:nvPr/>
-        </p:nvSpPr>
-        <p:spPr>
-          <a:xfrm>
-            <a:off x="4460138" y="2642616"/>
-            <a:ext cx="3271418" cy="530352"/>
+          <p:cNvPr id="44" name="Text 42"/>
+          <p:cNvSpPr/>
+          <p:nvPr/>
+        </p:nvSpPr>
+        <p:spPr>
+          <a:xfrm>
+            <a:off x="7315200" y="3255264"/>
+            <a:ext cx="4218127" cy="274320"/>
+          </a:xfrm>
+          <a:prstGeom prst="rect">
+            <a:avLst/>
+          </a:prstGeom>
+          <a:noFill/>
+          <a:ln/>
+        </p:spPr>
+        <p:txBody>
+          <a:bodyPr wrap="square" lIns="0" tIns="0" rIns="0" bIns="0" rtlCol="0" anchor="ctr"/>
+          <a:lstStyle/>
+          <a:p>
+            <a:pPr indent="0" marL="0">
+              <a:buNone/>
+            </a:pPr>
+            <a:r>
+              <a:rPr lang="en-US" sz="1200" dirty="0">
+                <a:solidFill>
+                  <a:srgbClr val="222222"/>
+                </a:solidFill>
+                <a:latin typeface="Paperlogy 7 Bold" pitchFamily="34" charset="0"/>
+                <a:ea typeface="Paperlogy 7 Bold" pitchFamily="34" charset="-122"/>
+                <a:cs typeface="Paperlogy 7 Bold" pitchFamily="34" charset="-120"/>
+              </a:rPr>
+              <a:t>공개된 정확 일치 수치는 없다</a:t>
+            </a:r>
+            <a:endParaRPr lang="en-US" sz="1200" dirty="0"/>
+          </a:p>
+        </p:txBody>
+      </p:sp>
+      <p:sp>
+        <p:nvSpPr>
+          <p:cNvPr id="45" name="Text 43"/>
+          <p:cNvSpPr/>
+          <p:nvPr/>
+        </p:nvSpPr>
+        <p:spPr>
+          <a:xfrm>
+            <a:off x="7315200" y="3584448"/>
+            <a:ext cx="4199839" cy="347472"/>
           </a:xfrm>
           <a:prstGeom prst="rect">
             <a:avLst/>
@@ -10936,12 +12244,12 @@
           <a:p>
             <a:pPr indent="0" marL="0">
               <a:lnSpc>
-                <a:spcPct val="134000"/>
+                <a:spcPct val="140000"/>
               </a:lnSpc>
               <a:buNone/>
             </a:pPr>
             <a:r>
-              <a:rPr lang="en-US" sz="980" dirty="0">
+              <a:rPr lang="en-US" sz="940" dirty="0">
                 <a:solidFill>
                   <a:srgbClr val="45515E"/>
                 </a:solidFill>
@@ -10949,26 +12257,26 @@
                 <a:ea typeface="Paperlogy 4 Regular" pitchFamily="34" charset="-122"/>
                 <a:cs typeface="Paperlogy 4 Regular" pitchFamily="34" charset="-120"/>
               </a:rPr>
-              <a:t>/v1/embeddings·/v1/rerank에 batch {1·4·16·64}개 입력.</a:t>
-            </a:r>
-            <a:endParaRPr lang="en-US" sz="980" dirty="0"/>
-          </a:p>
-        </p:txBody>
-      </p:sp>
-      <p:sp>
-        <p:nvSpPr>
-          <p:cNvPr id="15" name="Shape 13"/>
-          <p:cNvSpPr/>
-          <p:nvPr/>
-        </p:nvSpPr>
-        <p:spPr>
-          <a:xfrm>
-            <a:off x="8097317" y="2185416"/>
-            <a:ext cx="3637178" cy="1097280"/>
+              <a:t>이 모델·방식 조합의 공식 GPU 리더보드 기록은 없다 — 리더보드는 대부분 대형 모델+에이전트. 표는 가장 근접한 공개 기준점이다.</a:t>
+            </a:r>
+            <a:endParaRPr lang="en-US" sz="940" dirty="0"/>
+          </a:p>
+        </p:txBody>
+      </p:sp>
+      <p:sp>
+        <p:nvSpPr>
+          <p:cNvPr id="46" name="Shape 44"/>
+          <p:cNvSpPr/>
+          <p:nvPr/>
+        </p:nvSpPr>
+        <p:spPr>
+          <a:xfrm>
+            <a:off x="7077456" y="4215384"/>
+            <a:ext cx="4657039" cy="950976"/>
           </a:xfrm>
           <a:prstGeom prst="roundRect">
             <a:avLst>
-              <a:gd name="adj" fmla="val 10833"/>
+              <a:gd name="adj" fmla="val 12500"/>
             </a:avLst>
           </a:prstGeom>
           <a:solidFill>
@@ -10991,75 +12299,75 @@
       </p:sp>
       <p:sp>
         <p:nvSpPr>
-          <p:cNvPr id="16" name="Shape 14"/>
-          <p:cNvSpPr/>
-          <p:nvPr/>
-        </p:nvSpPr>
-        <p:spPr>
-          <a:xfrm>
-            <a:off x="8280197" y="2331720"/>
-            <a:ext cx="658368" cy="256032"/>
+          <p:cNvPr id="47" name="Shape 45"/>
+          <p:cNvSpPr/>
+          <p:nvPr/>
+        </p:nvSpPr>
+        <p:spPr>
+          <a:xfrm>
+            <a:off x="7077456" y="4361688"/>
+            <a:ext cx="64008" cy="658368"/>
           </a:xfrm>
           <a:prstGeom prst="roundRect">
             <a:avLst>
-              <a:gd name="adj" fmla="val 50000"/>
+              <a:gd name="adj" fmla="val 42857"/>
             </a:avLst>
           </a:prstGeom>
           <a:solidFill>
-            <a:srgbClr val="8E8E93"/>
+            <a:srgbClr val="3B82F6"/>
           </a:solidFill>
           <a:ln/>
         </p:spPr>
       </p:sp>
       <p:sp>
         <p:nvSpPr>
-          <p:cNvPr id="17" name="Text 15"/>
-          <p:cNvSpPr/>
-          <p:nvPr/>
-        </p:nvSpPr>
-        <p:spPr>
-          <a:xfrm>
-            <a:off x="8280197" y="2331720"/>
-            <a:ext cx="658368" cy="256032"/>
-          </a:xfrm>
-          <a:prstGeom prst="rect">
-            <a:avLst/>
-          </a:prstGeom>
-          <a:noFill/>
-          <a:ln/>
-        </p:spPr>
-        <p:txBody>
-          <a:bodyPr wrap="square" lIns="0" tIns="0" rIns="0" bIns="0" rtlCol="0" anchor="ctr"/>
-          <a:lstStyle/>
-          <a:p>
-            <a:pPr algn="ctr" indent="0" marL="0">
-              <a:buNone/>
-            </a:pPr>
-            <a:r>
-              <a:rPr lang="en-US" sz="950" dirty="0">
-                <a:solidFill>
-                  <a:srgbClr val="FFFFFF"/>
-                </a:solidFill>
-                <a:latin typeface="Paperlogy 6 SemiBold" pitchFamily="34" charset="0"/>
-                <a:ea typeface="Paperlogy 6 SemiBold" pitchFamily="34" charset="-122"/>
-                <a:cs typeface="Paperlogy 6 SemiBold" pitchFamily="34" charset="-120"/>
-              </a:rPr>
-              <a:t>출력·분석</a:t>
-            </a:r>
-            <a:endParaRPr lang="en-US" sz="950" dirty="0"/>
-          </a:p>
-        </p:txBody>
-      </p:sp>
-      <p:sp>
-        <p:nvSpPr>
-          <p:cNvPr id="18" name="Text 16"/>
-          <p:cNvSpPr/>
-          <p:nvPr/>
-        </p:nvSpPr>
-        <p:spPr>
-          <a:xfrm>
-            <a:off x="8280197" y="2642616"/>
-            <a:ext cx="3271418" cy="530352"/>
+          <p:cNvPr id="48" name="Text 46"/>
+          <p:cNvSpPr/>
+          <p:nvPr/>
+        </p:nvSpPr>
+        <p:spPr>
+          <a:xfrm>
+            <a:off x="7315200" y="4352544"/>
+            <a:ext cx="4218127" cy="274320"/>
+          </a:xfrm>
+          <a:prstGeom prst="rect">
+            <a:avLst/>
+          </a:prstGeom>
+          <a:noFill/>
+          <a:ln/>
+        </p:spPr>
+        <p:txBody>
+          <a:bodyPr wrap="square" lIns="0" tIns="0" rIns="0" bIns="0" rtlCol="0" anchor="ctr"/>
+          <a:lstStyle/>
+          <a:p>
+            <a:pPr indent="0" marL="0">
+              <a:buNone/>
+            </a:pPr>
+            <a:r>
+              <a:rPr lang="en-US" sz="1200" dirty="0">
+                <a:solidFill>
+                  <a:srgbClr val="222222"/>
+                </a:solidFill>
+                <a:latin typeface="Paperlogy 7 Bold" pitchFamily="34" charset="0"/>
+                <a:ea typeface="Paperlogy 7 Bold" pitchFamily="34" charset="-122"/>
+                <a:cs typeface="Paperlogy 7 Bold" pitchFamily="34" charset="-120"/>
+              </a:rPr>
+              <a:t>같은 방식이면 큰 모델도 한 자릿수</a:t>
+            </a:r>
+            <a:endParaRPr lang="en-US" sz="1200" dirty="0"/>
+          </a:p>
+        </p:txBody>
+      </p:sp>
+      <p:sp>
+        <p:nvSpPr>
+          <p:cNvPr id="49" name="Text 47"/>
+          <p:cNvSpPr/>
+          <p:nvPr/>
+        </p:nvSpPr>
+        <p:spPr>
+          <a:xfrm>
+            <a:off x="7315200" y="4681728"/>
+            <a:ext cx="4199839" cy="347472"/>
           </a:xfrm>
           <a:prstGeom prst="rect">
             <a:avLst/>
@@ -11073,12 +12381,12 @@
           <a:p>
             <a:pPr indent="0" marL="0">
               <a:lnSpc>
-                <a:spcPct val="134000"/>
+                <a:spcPct val="140000"/>
               </a:lnSpc>
               <a:buNone/>
             </a:pPr>
             <a:r>
-              <a:rPr lang="en-US" sz="980" dirty="0">
+              <a:rPr lang="en-US" sz="940" dirty="0">
                 <a:solidFill>
                   <a:srgbClr val="45515E"/>
                 </a:solidFill>
@@ -11086,65 +12394,26 @@
                 <a:ea typeface="Paperlogy 4 Regular" pitchFamily="34" charset="-122"/>
                 <a:cs typeface="Paperlogy 4 Regular" pitchFamily="34" charset="-120"/>
               </a:rPr>
-              <a:t>초당 처리 건수(inputs/s), 배치 크기별 효율.</a:t>
-            </a:r>
-            <a:endParaRPr lang="en-US" sz="980" dirty="0"/>
-          </a:p>
-        </p:txBody>
-      </p:sp>
-      <p:sp>
-        <p:nvSpPr>
-          <p:cNvPr id="19" name="Text 17"/>
-          <p:cNvSpPr/>
-          <p:nvPr/>
-        </p:nvSpPr>
-        <p:spPr>
-          <a:xfrm>
-            <a:off x="457200" y="3456432"/>
-            <a:ext cx="1828800" cy="274320"/>
-          </a:xfrm>
-          <a:prstGeom prst="rect">
-            <a:avLst/>
-          </a:prstGeom>
-          <a:noFill/>
-          <a:ln/>
-        </p:spPr>
-        <p:txBody>
-          <a:bodyPr wrap="square" lIns="0" tIns="0" rIns="0" bIns="0" rtlCol="0" anchor="ctr"/>
-          <a:lstStyle/>
-          <a:p>
-            <a:pPr indent="0" marL="0">
-              <a:buNone/>
-            </a:pPr>
-            <a:r>
-              <a:rPr lang="en-US" sz="1300" dirty="0">
-                <a:solidFill>
-                  <a:srgbClr val="1456F0"/>
-                </a:solidFill>
-                <a:latin typeface="Paperlogy 7 Bold" pitchFamily="34" charset="0"/>
-                <a:ea typeface="Paperlogy 7 Bold" pitchFamily="34" charset="-122"/>
-                <a:cs typeface="Paperlogy 7 Bold" pitchFamily="34" charset="-120"/>
-              </a:rPr>
-              <a:t>결과</a:t>
-            </a:r>
-            <a:endParaRPr lang="en-US" sz="1300" dirty="0"/>
-          </a:p>
-        </p:txBody>
-      </p:sp>
-      <p:sp>
-        <p:nvSpPr>
-          <p:cNvPr id="20" name="Shape 18"/>
-          <p:cNvSpPr/>
-          <p:nvPr/>
-        </p:nvSpPr>
-        <p:spPr>
-          <a:xfrm>
-            <a:off x="457200" y="3767328"/>
-            <a:ext cx="3566160" cy="2496312"/>
+              <a:t>single-shot에선 8B보다 훨씬 큰 GPT-4·Claude 2·70B도 1.7~5.4%. 8B는 그 아래 — 50건 기준 기대 해결 ≈ 0~1건.</a:t>
+            </a:r>
+            <a:endParaRPr lang="en-US" sz="940" dirty="0"/>
+          </a:p>
+        </p:txBody>
+      </p:sp>
+      <p:sp>
+        <p:nvSpPr>
+          <p:cNvPr id="50" name="Shape 48"/>
+          <p:cNvSpPr/>
+          <p:nvPr/>
+        </p:nvSpPr>
+        <p:spPr>
+          <a:xfrm>
+            <a:off x="7077456" y="5312664"/>
+            <a:ext cx="4657039" cy="950976"/>
           </a:xfrm>
           <a:prstGeom prst="roundRect">
             <a:avLst>
-              <a:gd name="adj" fmla="val 4762"/>
+              <a:gd name="adj" fmla="val 12500"/>
             </a:avLst>
           </a:prstGeom>
           <a:solidFill>
@@ -11167,350 +12436,14 @@
       </p:sp>
       <p:sp>
         <p:nvSpPr>
-          <p:cNvPr id="21" name="Text 19"/>
-          <p:cNvSpPr/>
-          <p:nvPr/>
-        </p:nvSpPr>
-        <p:spPr>
-          <a:xfrm>
-            <a:off x="713232" y="3986784"/>
-            <a:ext cx="3054096" cy="274320"/>
-          </a:xfrm>
-          <a:prstGeom prst="rect">
-            <a:avLst/>
-          </a:prstGeom>
-          <a:noFill/>
-          <a:ln/>
-        </p:spPr>
-        <p:txBody>
-          <a:bodyPr wrap="square" lIns="0" tIns="0" rIns="0" bIns="0" rtlCol="0" anchor="ctr"/>
-          <a:lstStyle/>
-          <a:p>
-            <a:pPr indent="0" marL="0">
-              <a:buNone/>
-            </a:pPr>
-            <a:r>
-              <a:rPr lang="en-US" sz="1250" dirty="0">
-                <a:solidFill>
-                  <a:srgbClr val="8E8E93"/>
-                </a:solidFill>
-                <a:latin typeface="Paperlogy 6 SemiBold" pitchFamily="34" charset="0"/>
-                <a:ea typeface="Paperlogy 6 SemiBold" pitchFamily="34" charset="-122"/>
-                <a:cs typeface="Paperlogy 6 SemiBold" pitchFamily="34" charset="-120"/>
-              </a:rPr>
-              <a:t>Qwen3-Embedding-8B</a:t>
-            </a:r>
-            <a:endParaRPr lang="en-US" sz="1250" dirty="0"/>
-          </a:p>
-        </p:txBody>
-      </p:sp>
-      <p:sp>
-        <p:nvSpPr>
-          <p:cNvPr id="22" name="Text 20"/>
-          <p:cNvSpPr/>
-          <p:nvPr/>
-        </p:nvSpPr>
-        <p:spPr>
-          <a:xfrm>
-            <a:off x="713232" y="4297680"/>
-            <a:ext cx="3054096" cy="640080"/>
-          </a:xfrm>
-          <a:prstGeom prst="rect">
-            <a:avLst/>
-          </a:prstGeom>
-          <a:noFill/>
-          <a:ln/>
-        </p:spPr>
-        <p:txBody>
-          <a:bodyPr wrap="square" lIns="0" tIns="0" rIns="0" bIns="0" rtlCol="0" anchor="ctr"/>
-          <a:lstStyle/>
-          <a:p>
-            <a:pPr indent="0" marL="0">
-              <a:buNone/>
-            </a:pPr>
-            <a:r>
-              <a:rPr lang="en-US" sz="4000" dirty="0">
-                <a:solidFill>
-                  <a:srgbClr val="1456F0"/>
-                </a:solidFill>
-                <a:latin typeface="Paperlogy 7 Bold" pitchFamily="34" charset="0"/>
-                <a:ea typeface="Paperlogy 7 Bold" pitchFamily="34" charset="-122"/>
-                <a:cs typeface="Paperlogy 7 Bold" pitchFamily="34" charset="-120"/>
-              </a:rPr>
-              <a:t>1.17</a:t>
-            </a:r>
-            <a:pPr indent="0" marL="0">
-              <a:buNone/>
-            </a:pPr>
-            <a:r>
-              <a:rPr lang="en-US" sz="1300" dirty="0">
-                <a:solidFill>
-                  <a:srgbClr val="45515E"/>
-                </a:solidFill>
-                <a:latin typeface="Paperlogy 6 SemiBold" pitchFamily="34" charset="0"/>
-                <a:ea typeface="Paperlogy 6 SemiBold" pitchFamily="34" charset="-122"/>
-                <a:cs typeface="Paperlogy 6 SemiBold" pitchFamily="34" charset="-120"/>
-              </a:rPr>
-              <a:t>  inputs/s</a:t>
-            </a:r>
-            <a:endParaRPr lang="en-US" sz="4000" dirty="0"/>
-          </a:p>
-        </p:txBody>
-      </p:sp>
-      <p:sp>
-        <p:nvSpPr>
-          <p:cNvPr id="23" name="Text 21"/>
-          <p:cNvSpPr/>
-          <p:nvPr/>
-        </p:nvSpPr>
-        <p:spPr>
-          <a:xfrm>
-            <a:off x="713232" y="5010912"/>
-            <a:ext cx="3054096" cy="457200"/>
-          </a:xfrm>
-          <a:prstGeom prst="rect">
-            <a:avLst/>
-          </a:prstGeom>
-          <a:noFill/>
-          <a:ln/>
-        </p:spPr>
-        <p:txBody>
-          <a:bodyPr wrap="square" lIns="0" tIns="0" rIns="0" bIns="0" rtlCol="0" anchor="ctr"/>
-          <a:lstStyle/>
-          <a:p>
-            <a:pPr indent="0" marL="0">
-              <a:lnSpc>
-                <a:spcPct val="135000"/>
-              </a:lnSpc>
-              <a:buNone/>
-            </a:pPr>
-            <a:r>
-              <a:rPr lang="en-US" sz="980" dirty="0">
-                <a:solidFill>
-                  <a:srgbClr val="45515E"/>
-                </a:solidFill>
-                <a:latin typeface="Paperlogy 4 Regular" pitchFamily="34" charset="0"/>
-                <a:ea typeface="Paperlogy 4 Regular" pitchFamily="34" charset="-122"/>
-                <a:cs typeface="Paperlogy 4 Regular" pitchFamily="34" charset="-120"/>
-              </a:rPr>
-              <a:t>batch 1·16·64 모두 동일 — 배치 이득 없음</a:t>
-            </a:r>
-            <a:endParaRPr lang="en-US" sz="980" dirty="0"/>
-          </a:p>
-        </p:txBody>
-      </p:sp>
-      <p:sp>
-        <p:nvSpPr>
-          <p:cNvPr id="24" name="Shape 22"/>
-          <p:cNvSpPr/>
-          <p:nvPr/>
-        </p:nvSpPr>
-        <p:spPr>
-          <a:xfrm>
-            <a:off x="4206240" y="3767328"/>
-            <a:ext cx="3566160" cy="2496312"/>
-          </a:xfrm>
-          <a:prstGeom prst="roundRect">
-            <a:avLst>
-              <a:gd name="adj" fmla="val 4762"/>
-            </a:avLst>
-          </a:prstGeom>
-          <a:solidFill>
-            <a:srgbClr val="FFFFFF"/>
-          </a:solidFill>
-          <a:ln w="12700">
-            <a:solidFill>
-              <a:srgbClr val="F2F3F5"/>
-            </a:solidFill>
-            <a:prstDash val="solid"/>
-          </a:ln>
-          <a:effectLst>
-            <a:outerShdw sx="100000" sy="100000" kx="0" ky="0" algn="bl" rotWithShape="0" blurRad="76200" dist="25400" dir="5400000">
-              <a:srgbClr val="000000">
-                <a:alpha val="8000"/>
-              </a:srgbClr>
-            </a:outerShdw>
-          </a:effectLst>
-        </p:spPr>
-      </p:sp>
-      <p:sp>
-        <p:nvSpPr>
-          <p:cNvPr id="25" name="Text 23"/>
-          <p:cNvSpPr/>
-          <p:nvPr/>
-        </p:nvSpPr>
-        <p:spPr>
-          <a:xfrm>
-            <a:off x="4462272" y="3986784"/>
-            <a:ext cx="3054096" cy="274320"/>
-          </a:xfrm>
-          <a:prstGeom prst="rect">
-            <a:avLst/>
-          </a:prstGeom>
-          <a:noFill/>
-          <a:ln/>
-        </p:spPr>
-        <p:txBody>
-          <a:bodyPr wrap="square" lIns="0" tIns="0" rIns="0" bIns="0" rtlCol="0" anchor="ctr"/>
-          <a:lstStyle/>
-          <a:p>
-            <a:pPr indent="0" marL="0">
-              <a:buNone/>
-            </a:pPr>
-            <a:r>
-              <a:rPr lang="en-US" sz="1250" dirty="0">
-                <a:solidFill>
-                  <a:srgbClr val="8E8E93"/>
-                </a:solidFill>
-                <a:latin typeface="Paperlogy 6 SemiBold" pitchFamily="34" charset="0"/>
-                <a:ea typeface="Paperlogy 6 SemiBold" pitchFamily="34" charset="-122"/>
-                <a:cs typeface="Paperlogy 6 SemiBold" pitchFamily="34" charset="-120"/>
-              </a:rPr>
-              <a:t>Qwen3-Reranker-8B</a:t>
-            </a:r>
-            <a:endParaRPr lang="en-US" sz="1250" dirty="0"/>
-          </a:p>
-        </p:txBody>
-      </p:sp>
-      <p:sp>
-        <p:nvSpPr>
-          <p:cNvPr id="26" name="Text 24"/>
-          <p:cNvSpPr/>
-          <p:nvPr/>
-        </p:nvSpPr>
-        <p:spPr>
-          <a:xfrm>
-            <a:off x="4462272" y="4297680"/>
-            <a:ext cx="3054096" cy="640080"/>
-          </a:xfrm>
-          <a:prstGeom prst="rect">
-            <a:avLst/>
-          </a:prstGeom>
-          <a:noFill/>
-          <a:ln/>
-        </p:spPr>
-        <p:txBody>
-          <a:bodyPr wrap="square" lIns="0" tIns="0" rIns="0" bIns="0" rtlCol="0" anchor="ctr"/>
-          <a:lstStyle/>
-          <a:p>
-            <a:pPr indent="0" marL="0">
-              <a:buNone/>
-            </a:pPr>
-            <a:r>
-              <a:rPr lang="en-US" sz="4000" dirty="0">
-                <a:solidFill>
-                  <a:srgbClr val="1456F0"/>
-                </a:solidFill>
-                <a:latin typeface="Paperlogy 7 Bold" pitchFamily="34" charset="0"/>
-                <a:ea typeface="Paperlogy 7 Bold" pitchFamily="34" charset="-122"/>
-                <a:cs typeface="Paperlogy 7 Bold" pitchFamily="34" charset="-120"/>
-              </a:rPr>
-              <a:t>1.17</a:t>
-            </a:r>
-            <a:pPr indent="0" marL="0">
-              <a:buNone/>
-            </a:pPr>
-            <a:r>
-              <a:rPr lang="en-US" sz="1300" dirty="0">
-                <a:solidFill>
-                  <a:srgbClr val="45515E"/>
-                </a:solidFill>
-                <a:latin typeface="Paperlogy 6 SemiBold" pitchFamily="34" charset="0"/>
-                <a:ea typeface="Paperlogy 6 SemiBold" pitchFamily="34" charset="-122"/>
-                <a:cs typeface="Paperlogy 6 SemiBold" pitchFamily="34" charset="-120"/>
-              </a:rPr>
-              <a:t>  pairs/s</a:t>
-            </a:r>
-            <a:endParaRPr lang="en-US" sz="4000" dirty="0"/>
-          </a:p>
-        </p:txBody>
-      </p:sp>
-      <p:sp>
-        <p:nvSpPr>
-          <p:cNvPr id="27" name="Text 25"/>
-          <p:cNvSpPr/>
-          <p:nvPr/>
-        </p:nvSpPr>
-        <p:spPr>
-          <a:xfrm>
-            <a:off x="4462272" y="5010912"/>
-            <a:ext cx="3054096" cy="457200"/>
-          </a:xfrm>
-          <a:prstGeom prst="rect">
-            <a:avLst/>
-          </a:prstGeom>
-          <a:noFill/>
-          <a:ln/>
-        </p:spPr>
-        <p:txBody>
-          <a:bodyPr wrap="square" lIns="0" tIns="0" rIns="0" bIns="0" rtlCol="0" anchor="ctr"/>
-          <a:lstStyle/>
-          <a:p>
-            <a:pPr indent="0" marL="0">
-              <a:lnSpc>
-                <a:spcPct val="135000"/>
-              </a:lnSpc>
-              <a:buNone/>
-            </a:pPr>
-            <a:r>
-              <a:rPr lang="en-US" sz="980" dirty="0">
-                <a:solidFill>
-                  <a:srgbClr val="45515E"/>
-                </a:solidFill>
-                <a:latin typeface="Paperlogy 4 Regular" pitchFamily="34" charset="0"/>
-                <a:ea typeface="Paperlogy 4 Regular" pitchFamily="34" charset="-122"/>
-                <a:cs typeface="Paperlogy 4 Regular" pitchFamily="34" charset="-120"/>
-              </a:rPr>
-              <a:t>쿼리당 100문서 ≈ 85초 — 항목당 약 0.85초</a:t>
-            </a:r>
-            <a:endParaRPr lang="en-US" sz="980" dirty="0"/>
-          </a:p>
-        </p:txBody>
-      </p:sp>
-      <p:sp>
-        <p:nvSpPr>
-          <p:cNvPr id="28" name="Shape 26"/>
-          <p:cNvSpPr/>
-          <p:nvPr/>
-        </p:nvSpPr>
-        <p:spPr>
-          <a:xfrm>
-            <a:off x="7955280" y="3767328"/>
-            <a:ext cx="3779215" cy="2496312"/>
-          </a:xfrm>
-          <a:prstGeom prst="roundRect">
-            <a:avLst>
-              <a:gd name="adj" fmla="val 4762"/>
-            </a:avLst>
-          </a:prstGeom>
-          <a:solidFill>
-            <a:srgbClr val="FFFFFF"/>
-          </a:solidFill>
-          <a:ln w="12700">
-            <a:solidFill>
-              <a:srgbClr val="F2F3F5"/>
-            </a:solidFill>
-            <a:prstDash val="solid"/>
-          </a:ln>
-          <a:effectLst>
-            <a:outerShdw sx="100000" sy="100000" kx="0" ky="0" algn="bl" rotWithShape="0" blurRad="76200" dist="25400" dir="5400000">
-              <a:srgbClr val="000000">
-                <a:alpha val="8000"/>
-              </a:srgbClr>
-            </a:outerShdw>
-          </a:effectLst>
-        </p:spPr>
-      </p:sp>
-      <p:sp>
-        <p:nvSpPr>
-          <p:cNvPr id="29" name="Shape 27"/>
-          <p:cNvSpPr/>
-          <p:nvPr/>
-        </p:nvSpPr>
-        <p:spPr>
-          <a:xfrm>
-            <a:off x="7955280" y="4005072"/>
-            <a:ext cx="64008" cy="2020824"/>
+          <p:cNvPr id="51" name="Shape 49"/>
+          <p:cNvSpPr/>
+          <p:nvPr/>
+        </p:nvSpPr>
+        <p:spPr>
+          <a:xfrm>
+            <a:off x="7077456" y="5458968"/>
+            <a:ext cx="64008" cy="658368"/>
           </a:xfrm>
           <a:prstGeom prst="roundRect">
             <a:avLst>
@@ -11518,37 +12451,37 @@
             </a:avLst>
           </a:prstGeom>
           <a:solidFill>
-            <a:srgbClr val="EA5EC1"/>
+            <a:srgbClr val="1456F0"/>
           </a:solidFill>
           <a:ln/>
         </p:spPr>
       </p:sp>
       <p:sp>
         <p:nvSpPr>
-          <p:cNvPr id="30" name="Text 28"/>
-          <p:cNvSpPr/>
-          <p:nvPr/>
-        </p:nvSpPr>
-        <p:spPr>
-          <a:xfrm>
-            <a:off x="8229600" y="3986784"/>
-            <a:ext cx="3276295" cy="310896"/>
-          </a:xfrm>
-          <a:prstGeom prst="rect">
-            <a:avLst/>
-          </a:prstGeom>
-          <a:noFill/>
-          <a:ln/>
-        </p:spPr>
-        <p:txBody>
-          <a:bodyPr wrap="square" lIns="0" tIns="0" rIns="0" bIns="0" rtlCol="0" anchor="ctr"/>
-          <a:lstStyle/>
-          <a:p>
-            <a:pPr indent="0" marL="0">
-              <a:buNone/>
-            </a:pPr>
-            <a:r>
-              <a:rPr lang="en-US" sz="1400" dirty="0">
+          <p:cNvPr id="52" name="Text 50"/>
+          <p:cNvSpPr/>
+          <p:nvPr/>
+        </p:nvSpPr>
+        <p:spPr>
+          <a:xfrm>
+            <a:off x="7315200" y="5449824"/>
+            <a:ext cx="4218127" cy="274320"/>
+          </a:xfrm>
+          <a:prstGeom prst="rect">
+            <a:avLst/>
+          </a:prstGeom>
+          <a:noFill/>
+          <a:ln/>
+        </p:spPr>
+        <p:txBody>
+          <a:bodyPr wrap="square" lIns="0" tIns="0" rIns="0" bIns="0" rtlCol="0" anchor="ctr"/>
+          <a:lstStyle/>
+          <a:p>
+            <a:pPr indent="0" marL="0">
+              <a:buNone/>
+            </a:pPr>
+            <a:r>
+              <a:rPr lang="en-US" sz="1200" dirty="0">
                 <a:solidFill>
                   <a:srgbClr val="222222"/>
                 </a:solidFill>
@@ -11556,22 +12489,22 @@
                 <a:ea typeface="Paperlogy 7 Bold" pitchFamily="34" charset="-122"/>
                 <a:cs typeface="Paperlogy 7 Bold" pitchFamily="34" charset="-120"/>
               </a:rPr>
-              <a:t>처리량 이상 — 별도 점검 필요</a:t>
-            </a:r>
-            <a:endParaRPr lang="en-US" sz="1400" dirty="0"/>
-          </a:p>
-        </p:txBody>
-      </p:sp>
-      <p:sp>
-        <p:nvSpPr>
-          <p:cNvPr id="31" name="Text 29"/>
-          <p:cNvSpPr/>
-          <p:nvPr/>
-        </p:nvSpPr>
-        <p:spPr>
-          <a:xfrm>
-            <a:off x="8229600" y="4352544"/>
-            <a:ext cx="3230575" cy="1673352"/>
+              <a:t>개선은 하드웨어가 아니다</a:t>
+            </a:r>
+            <a:endParaRPr lang="en-US" sz="1200" dirty="0"/>
+          </a:p>
+        </p:txBody>
+      </p:sp>
+      <p:sp>
+        <p:nvSpPr>
+          <p:cNvPr id="53" name="Text 51"/>
+          <p:cNvSpPr/>
+          <p:nvPr/>
+        </p:nvSpPr>
+        <p:spPr>
+          <a:xfrm>
+            <a:off x="7315200" y="5779008"/>
+            <a:ext cx="4199839" cy="347472"/>
           </a:xfrm>
           <a:prstGeom prst="rect">
             <a:avLst/>
@@ -11585,12 +12518,12 @@
           <a:p>
             <a:pPr indent="0" marL="0">
               <a:lnSpc>
-                <a:spcPct val="150000"/>
+                <a:spcPct val="140000"/>
               </a:lnSpc>
               <a:buNone/>
             </a:pPr>
             <a:r>
-              <a:rPr lang="en-US" sz="1050" dirty="0">
+              <a:rPr lang="en-US" sz="940" dirty="0">
                 <a:solidFill>
                   <a:srgbClr val="45515E"/>
                 </a:solidFill>
@@ -11598,9 +12531,9 @@
                 <a:ea typeface="Paperlogy 4 Regular" pitchFamily="34" charset="-122"/>
                 <a:cs typeface="Paperlogy 4 Regular" pitchFamily="34" charset="-120"/>
               </a:rPr>
-              <a:t>두 모델 모두 항목당 약 0.85초 — 8B 생성 모델의 단일 prefill(수십 ms) 대비 수십 배 느리다. batch size를 키워도 처리량이 1.17/s로 고정돼 배칭이 동작하지 않는다. 아티팩트의 고정 버킷 패딩 또는 배칭 경로 미최적화 가능성 → 현재 설정으로는 대량 검색에 부적합하며 후속 점검이 필요하다.</a:t>
-            </a:r>
-            <a:endParaRPr lang="en-US" sz="1050" dirty="0"/>
+              <a:t>8B 아티팩트는 bf16(양자화 0)이라 GPU와 수치가 같다. 정확도는 더 큰 모델(4카드 32B·70B)이나 에이전트 스캐폴드로만 오른다.</a:t>
+            </a:r>
+            <a:endParaRPr lang="en-US" sz="940" dirty="0"/>
           </a:p>
         </p:txBody>
       </p:sp>
@@ -11669,7 +12602,7 @@
                 <a:ea typeface="Paperlogy 6 SemiBold" pitchFamily="34" charset="-122"/>
                 <a:cs typeface="Paperlogy 6 SemiBold" pitchFamily="34" charset="-120"/>
               </a:rPr>
-              <a:t>CONCLUSION</a:t>
+              <a:t>MODEL NOTE · 0.5B</a:t>
             </a:r>
             <a:endParaRPr lang="en-US" sz="1200" dirty="0"/>
           </a:p>
@@ -11708,7 +12641,2459 @@
                 <a:ea typeface="Paperlogy 5 Medium" pitchFamily="34" charset="-122"/>
                 <a:cs typeface="Paperlogy 5 Medium" pitchFamily="34" charset="-120"/>
               </a:rPr>
-              <a:t>16 / 16</a:t>
+              <a:t>16 / 18</a:t>
+            </a:r>
+            <a:endParaRPr lang="en-US" sz="1000" dirty="0"/>
+          </a:p>
+        </p:txBody>
+      </p:sp>
+      <p:sp>
+        <p:nvSpPr>
+          <p:cNvPr id="4" name="Text 2"/>
+          <p:cNvSpPr/>
+          <p:nvPr/>
+        </p:nvSpPr>
+        <p:spPr>
+          <a:xfrm>
+            <a:off x="4419295" y="6446520"/>
+            <a:ext cx="7315200" cy="228600"/>
+          </a:xfrm>
+          <a:prstGeom prst="rect">
+            <a:avLst/>
+          </a:prstGeom>
+          <a:noFill/>
+          <a:ln/>
+        </p:spPr>
+        <p:txBody>
+          <a:bodyPr wrap="square" lIns="0" tIns="0" rIns="0" bIns="0" rtlCol="0" anchor="ctr"/>
+          <a:lstStyle/>
+          <a:p>
+            <a:pPr algn="r" indent="0" marL="0">
+              <a:buNone/>
+            </a:pPr>
+            <a:r>
+              <a:rPr lang="en-US" sz="950" dirty="0">
+                <a:solidFill>
+                  <a:srgbClr val="8E8E93"/>
+                </a:solidFill>
+                <a:latin typeface="Paperlogy 4 Regular" pitchFamily="34" charset="0"/>
+                <a:ea typeface="Paperlogy 4 Regular" pitchFamily="34" charset="-122"/>
+                <a:cs typeface="Paperlogy 4 Regular" pitchFamily="34" charset="-120"/>
+              </a:rPr>
+              <a:t>출처: results/furiosa-ai__Qwen2.5-0.5B-Instruct</a:t>
+            </a:r>
+            <a:endParaRPr lang="en-US" sz="950" dirty="0"/>
+          </a:p>
+        </p:txBody>
+      </p:sp>
+      <p:sp>
+        <p:nvSpPr>
+          <p:cNvPr id="5" name="Text 3"/>
+          <p:cNvSpPr/>
+          <p:nvPr/>
+        </p:nvSpPr>
+        <p:spPr>
+          <a:xfrm>
+            <a:off x="457200" y="914400"/>
+            <a:ext cx="11277295" cy="640080"/>
+          </a:xfrm>
+          <a:prstGeom prst="rect">
+            <a:avLst/>
+          </a:prstGeom>
+          <a:noFill/>
+          <a:ln/>
+        </p:spPr>
+        <p:txBody>
+          <a:bodyPr wrap="square" lIns="0" tIns="0" rIns="0" bIns="0" rtlCol="0" anchor="ctr"/>
+          <a:lstStyle/>
+          <a:p>
+            <a:pPr indent="0" marL="0">
+              <a:lnSpc>
+                <a:spcPct val="118000"/>
+              </a:lnSpc>
+              <a:buNone/>
+            </a:pPr>
+            <a:r>
+              <a:rPr lang="en-US" sz="3100" spc="-60" kern="0" dirty="0">
+                <a:solidFill>
+                  <a:srgbClr val="222222"/>
+                </a:solidFill>
+                <a:latin typeface="Paperlogy 7 Bold" pitchFamily="34" charset="0"/>
+                <a:ea typeface="Paperlogy 7 Bold" pitchFamily="34" charset="-122"/>
+                <a:cs typeface="Paperlogy 7 Bold" pitchFamily="34" charset="-120"/>
+              </a:rPr>
+              <a:t>측정 모델 노트 — Qwen2.5-0.5B-Instruct</a:t>
+            </a:r>
+            <a:endParaRPr lang="en-US" sz="3100" dirty="0"/>
+          </a:p>
+        </p:txBody>
+      </p:sp>
+      <p:sp>
+        <p:nvSpPr>
+          <p:cNvPr id="6" name="Text 4"/>
+          <p:cNvSpPr/>
+          <p:nvPr/>
+        </p:nvSpPr>
+        <p:spPr>
+          <a:xfrm>
+            <a:off x="457200" y="1581912"/>
+            <a:ext cx="11277295" cy="365760"/>
+          </a:xfrm>
+          <a:prstGeom prst="rect">
+            <a:avLst/>
+          </a:prstGeom>
+          <a:noFill/>
+          <a:ln/>
+        </p:spPr>
+        <p:txBody>
+          <a:bodyPr wrap="square" lIns="0" tIns="0" rIns="0" bIns="0" rtlCol="0" anchor="ctr"/>
+          <a:lstStyle/>
+          <a:p>
+            <a:pPr indent="0" marL="0">
+              <a:lnSpc>
+                <a:spcPct val="140000"/>
+              </a:lnSpc>
+              <a:buNone/>
+            </a:pPr>
+            <a:r>
+              <a:rPr lang="en-US" sz="1500" dirty="0">
+                <a:solidFill>
+                  <a:srgbClr val="45515E"/>
+                </a:solidFill>
+                <a:latin typeface="Paperlogy 5 Medium" pitchFamily="34" charset="0"/>
+                <a:ea typeface="Paperlogy 5 Medium" pitchFamily="34" charset="-122"/>
+                <a:cs typeface="Paperlogy 5 Medium" pitchFamily="34" charset="-120"/>
+              </a:rPr>
+              <a:t>측정 4모델 중 최소 — 속도는 최상이나 컨텍스트 4,096 한계로 코드 작업엔 부적합</a:t>
+            </a:r>
+            <a:endParaRPr lang="en-US" sz="1500" dirty="0"/>
+          </a:p>
+        </p:txBody>
+      </p:sp>
+      <p:sp>
+        <p:nvSpPr>
+          <p:cNvPr id="7" name="Shape 5"/>
+          <p:cNvSpPr/>
+          <p:nvPr/>
+        </p:nvSpPr>
+        <p:spPr>
+          <a:xfrm>
+            <a:off x="457200" y="2185416"/>
+            <a:ext cx="11277295" cy="749808"/>
+          </a:xfrm>
+          <a:prstGeom prst="roundRect">
+            <a:avLst>
+              <a:gd name="adj" fmla="val 19512"/>
+            </a:avLst>
+          </a:prstGeom>
+          <a:solidFill>
+            <a:srgbClr val="1456F0"/>
+          </a:solidFill>
+          <a:ln/>
+          <a:effectLst>
+            <a:outerShdw sx="100000" sy="100000" kx="0" ky="0" algn="bl" rotWithShape="0" blurRad="190500" dist="50800" dir="5400000">
+              <a:srgbClr val="2c1e74">
+                <a:alpha val="16000"/>
+              </a:srgbClr>
+            </a:outerShdw>
+          </a:effectLst>
+        </p:spPr>
+      </p:sp>
+      <p:sp>
+        <p:nvSpPr>
+          <p:cNvPr id="8" name="Shape 6"/>
+          <p:cNvSpPr/>
+          <p:nvPr/>
+        </p:nvSpPr>
+        <p:spPr>
+          <a:xfrm>
+            <a:off x="749808" y="2414016"/>
+            <a:ext cx="1060704" cy="292608"/>
+          </a:xfrm>
+          <a:prstGeom prst="roundRect">
+            <a:avLst>
+              <a:gd name="adj" fmla="val 50000"/>
+            </a:avLst>
+          </a:prstGeom>
+          <a:solidFill>
+            <a:srgbClr val="FFFFFF"/>
+          </a:solidFill>
+          <a:ln/>
+        </p:spPr>
+      </p:sp>
+      <p:sp>
+        <p:nvSpPr>
+          <p:cNvPr id="9" name="Text 7"/>
+          <p:cNvSpPr/>
+          <p:nvPr/>
+        </p:nvSpPr>
+        <p:spPr>
+          <a:xfrm>
+            <a:off x="749808" y="2414016"/>
+            <a:ext cx="1060704" cy="292608"/>
+          </a:xfrm>
+          <a:prstGeom prst="rect">
+            <a:avLst/>
+          </a:prstGeom>
+          <a:noFill/>
+          <a:ln/>
+        </p:spPr>
+        <p:txBody>
+          <a:bodyPr wrap="square" lIns="0" tIns="0" rIns="0" bIns="0" rtlCol="0" anchor="ctr"/>
+          <a:lstStyle/>
+          <a:p>
+            <a:pPr algn="ctr" indent="0" marL="0">
+              <a:buNone/>
+            </a:pPr>
+            <a:r>
+              <a:rPr lang="en-US" sz="1000" dirty="0">
+                <a:solidFill>
+                  <a:srgbClr val="1456F0"/>
+                </a:solidFill>
+                <a:latin typeface="Paperlogy 6 SemiBold" pitchFamily="34" charset="0"/>
+                <a:ea typeface="Paperlogy 6 SemiBold" pitchFamily="34" charset="-122"/>
+                <a:cs typeface="Paperlogy 6 SemiBold" pitchFamily="34" charset="-120"/>
+              </a:rPr>
+              <a:t>smoke</a:t>
+            </a:r>
+            <a:endParaRPr lang="en-US" sz="1000" dirty="0"/>
+          </a:p>
+        </p:txBody>
+      </p:sp>
+      <p:sp>
+        <p:nvSpPr>
+          <p:cNvPr id="10" name="Text 8"/>
+          <p:cNvSpPr/>
+          <p:nvPr/>
+        </p:nvSpPr>
+        <p:spPr>
+          <a:xfrm>
+            <a:off x="1975104" y="2185416"/>
+            <a:ext cx="9509760" cy="749808"/>
+          </a:xfrm>
+          <a:prstGeom prst="rect">
+            <a:avLst/>
+          </a:prstGeom>
+          <a:noFill/>
+          <a:ln/>
+        </p:spPr>
+        <p:txBody>
+          <a:bodyPr wrap="square" lIns="0" tIns="0" rIns="0" bIns="0" rtlCol="0" anchor="ctr"/>
+          <a:lstStyle/>
+          <a:p>
+            <a:pPr indent="0" marL="0">
+              <a:lnSpc>
+                <a:spcPct val="130000"/>
+              </a:lnSpc>
+              <a:buNone/>
+            </a:pPr>
+            <a:r>
+              <a:rPr lang="en-US" sz="1150" dirty="0">
+                <a:solidFill>
+                  <a:srgbClr val="FFFFFF"/>
+                </a:solidFill>
+                <a:latin typeface="Paperlogy 5 Medium" pitchFamily="34" charset="0"/>
+                <a:ea typeface="Paperlogy 5 Medium" pitchFamily="34" charset="-122"/>
+                <a:cs typeface="Paperlogy 5 Medium" pitchFamily="34" charset="-120"/>
+              </a:rPr>
+              <a:t>자동화 파이프라인(서빙→측정→채점)이 정상 동작하는지 빠르게 확인하는 검증용 모델 — models.yaml에 role: smoke로 지정된, 코드 생성 후보가 아닌 모델.</a:t>
+            </a:r>
+            <a:endParaRPr lang="en-US" sz="1150" dirty="0"/>
+          </a:p>
+        </p:txBody>
+      </p:sp>
+      <p:sp>
+        <p:nvSpPr>
+          <p:cNvPr id="11" name="Shape 9"/>
+          <p:cNvSpPr/>
+          <p:nvPr/>
+        </p:nvSpPr>
+        <p:spPr>
+          <a:xfrm>
+            <a:off x="457200" y="3099816"/>
+            <a:ext cx="5538064" cy="2660904"/>
+          </a:xfrm>
+          <a:prstGeom prst="roundRect">
+            <a:avLst>
+              <a:gd name="adj" fmla="val 4467"/>
+            </a:avLst>
+          </a:prstGeom>
+          <a:solidFill>
+            <a:srgbClr val="FFFFFF"/>
+          </a:solidFill>
+          <a:ln w="12700">
+            <a:solidFill>
+              <a:srgbClr val="F2F3F5"/>
+            </a:solidFill>
+            <a:prstDash val="solid"/>
+          </a:ln>
+          <a:effectLst>
+            <a:outerShdw sx="100000" sy="100000" kx="0" ky="0" algn="bl" rotWithShape="0" blurRad="76200" dist="25400" dir="5400000">
+              <a:srgbClr val="000000">
+                <a:alpha val="8000"/>
+              </a:srgbClr>
+            </a:outerShdw>
+          </a:effectLst>
+        </p:spPr>
+      </p:sp>
+      <p:sp>
+        <p:nvSpPr>
+          <p:cNvPr id="12" name="Text 10"/>
+          <p:cNvSpPr/>
+          <p:nvPr/>
+        </p:nvSpPr>
+        <p:spPr>
+          <a:xfrm>
+            <a:off x="694944" y="3246120"/>
+            <a:ext cx="5080864" cy="274320"/>
+          </a:xfrm>
+          <a:prstGeom prst="rect">
+            <a:avLst/>
+          </a:prstGeom>
+          <a:noFill/>
+          <a:ln/>
+        </p:spPr>
+        <p:txBody>
+          <a:bodyPr wrap="square" lIns="0" tIns="0" rIns="0" bIns="0" rtlCol="0" anchor="ctr"/>
+          <a:lstStyle/>
+          <a:p>
+            <a:pPr indent="0" marL="0">
+              <a:buNone/>
+            </a:pPr>
+            <a:r>
+              <a:rPr lang="en-US" sz="1250" dirty="0">
+                <a:solidFill>
+                  <a:srgbClr val="1456F0"/>
+                </a:solidFill>
+                <a:latin typeface="Paperlogy 6 SemiBold" pitchFamily="34" charset="0"/>
+                <a:ea typeface="Paperlogy 6 SemiBold" pitchFamily="34" charset="-122"/>
+                <a:cs typeface="Paperlogy 6 SemiBold" pitchFamily="34" charset="-120"/>
+              </a:rPr>
+              <a:t>강점 — 속도·처리량 (4모델 중 최상)</a:t>
+            </a:r>
+            <a:endParaRPr lang="en-US" sz="1250" dirty="0"/>
+          </a:p>
+        </p:txBody>
+      </p:sp>
+      <p:sp>
+        <p:nvSpPr>
+          <p:cNvPr id="13" name="Shape 11"/>
+          <p:cNvSpPr/>
+          <p:nvPr/>
+        </p:nvSpPr>
+        <p:spPr>
+          <a:xfrm>
+            <a:off x="694944" y="3759708"/>
+            <a:ext cx="64008" cy="384048"/>
+          </a:xfrm>
+          <a:prstGeom prst="roundRect">
+            <a:avLst>
+              <a:gd name="adj" fmla="val 42857"/>
+            </a:avLst>
+          </a:prstGeom>
+          <a:solidFill>
+            <a:srgbClr val="1456F0"/>
+          </a:solidFill>
+          <a:ln/>
+        </p:spPr>
+      </p:sp>
+      <p:sp>
+        <p:nvSpPr>
+          <p:cNvPr id="14" name="Text 12"/>
+          <p:cNvSpPr/>
+          <p:nvPr/>
+        </p:nvSpPr>
+        <p:spPr>
+          <a:xfrm>
+            <a:off x="841248" y="3648456"/>
+            <a:ext cx="1783080" cy="606552"/>
+          </a:xfrm>
+          <a:prstGeom prst="rect">
+            <a:avLst/>
+          </a:prstGeom>
+          <a:noFill/>
+          <a:ln/>
+        </p:spPr>
+        <p:txBody>
+          <a:bodyPr wrap="square" lIns="0" tIns="0" rIns="0" bIns="0" rtlCol="0" anchor="ctr"/>
+          <a:lstStyle/>
+          <a:p>
+            <a:pPr indent="0" marL="0">
+              <a:buNone/>
+            </a:pPr>
+            <a:r>
+              <a:rPr lang="en-US" sz="1900" dirty="0">
+                <a:solidFill>
+                  <a:srgbClr val="1456F0"/>
+                </a:solidFill>
+                <a:latin typeface="Paperlogy 7 Bold" pitchFamily="34" charset="0"/>
+                <a:ea typeface="Paperlogy 7 Bold" pitchFamily="34" charset="-122"/>
+                <a:cs typeface="Paperlogy 7 Bold" pitchFamily="34" charset="-120"/>
+              </a:rPr>
+              <a:t>85 tok/s</a:t>
+            </a:r>
+            <a:endParaRPr lang="en-US" sz="1900" dirty="0"/>
+          </a:p>
+        </p:txBody>
+      </p:sp>
+      <p:sp>
+        <p:nvSpPr>
+          <p:cNvPr id="15" name="Text 13"/>
+          <p:cNvSpPr/>
+          <p:nvPr/>
+        </p:nvSpPr>
+        <p:spPr>
+          <a:xfrm>
+            <a:off x="2697480" y="3648456"/>
+            <a:ext cx="3023464" cy="606552"/>
+          </a:xfrm>
+          <a:prstGeom prst="rect">
+            <a:avLst/>
+          </a:prstGeom>
+          <a:noFill/>
+          <a:ln/>
+        </p:spPr>
+        <p:txBody>
+          <a:bodyPr wrap="square" lIns="0" tIns="0" rIns="0" bIns="0" rtlCol="0" anchor="ctr"/>
+          <a:lstStyle/>
+          <a:p>
+            <a:pPr indent="0" marL="0">
+              <a:lnSpc>
+                <a:spcPct val="134000"/>
+              </a:lnSpc>
+              <a:buNone/>
+            </a:pPr>
+            <a:r>
+              <a:rPr lang="en-US" sz="980" dirty="0">
+                <a:solidFill>
+                  <a:srgbClr val="45515E"/>
+                </a:solidFill>
+                <a:latin typeface="Paperlogy 4 Regular" pitchFamily="34" charset="0"/>
+                <a:ea typeface="Paperlogy 4 Regular" pitchFamily="34" charset="-122"/>
+                <a:cs typeface="Paperlogy 4 Regular" pitchFamily="34" charset="-120"/>
+              </a:rPr>
+              <a:t>단일 요청 생성 속도 — Llama-3.1-8B(55 tok/s)의 약 1.5배.</a:t>
+            </a:r>
+            <a:endParaRPr lang="en-US" sz="980" dirty="0"/>
+          </a:p>
+        </p:txBody>
+      </p:sp>
+      <p:sp>
+        <p:nvSpPr>
+          <p:cNvPr id="16" name="Shape 14"/>
+          <p:cNvSpPr/>
+          <p:nvPr/>
+        </p:nvSpPr>
+        <p:spPr>
+          <a:xfrm>
+            <a:off x="694944" y="4309872"/>
+            <a:ext cx="5062576" cy="0"/>
+          </a:xfrm>
+          <a:prstGeom prst="line">
+            <a:avLst/>
+          </a:prstGeom>
+          <a:noFill/>
+          <a:ln w="12700">
+            <a:solidFill>
+              <a:srgbClr val="F2F3F5"/>
+            </a:solidFill>
+            <a:prstDash val="solid"/>
+          </a:ln>
+        </p:spPr>
+      </p:sp>
+      <p:sp>
+        <p:nvSpPr>
+          <p:cNvPr id="17" name="Shape 15"/>
+          <p:cNvSpPr/>
+          <p:nvPr/>
+        </p:nvSpPr>
+        <p:spPr>
+          <a:xfrm>
+            <a:off x="694944" y="4475988"/>
+            <a:ext cx="64008" cy="384048"/>
+          </a:xfrm>
+          <a:prstGeom prst="roundRect">
+            <a:avLst>
+              <a:gd name="adj" fmla="val 42857"/>
+            </a:avLst>
+          </a:prstGeom>
+          <a:solidFill>
+            <a:srgbClr val="1456F0"/>
+          </a:solidFill>
+          <a:ln/>
+        </p:spPr>
+      </p:sp>
+      <p:sp>
+        <p:nvSpPr>
+          <p:cNvPr id="18" name="Text 16"/>
+          <p:cNvSpPr/>
+          <p:nvPr/>
+        </p:nvSpPr>
+        <p:spPr>
+          <a:xfrm>
+            <a:off x="841248" y="4364736"/>
+            <a:ext cx="1783080" cy="606552"/>
+          </a:xfrm>
+          <a:prstGeom prst="rect">
+            <a:avLst/>
+          </a:prstGeom>
+          <a:noFill/>
+          <a:ln/>
+        </p:spPr>
+        <p:txBody>
+          <a:bodyPr wrap="square" lIns="0" tIns="0" rIns="0" bIns="0" rtlCol="0" anchor="ctr"/>
+          <a:lstStyle/>
+          <a:p>
+            <a:pPr indent="0" marL="0">
+              <a:buNone/>
+            </a:pPr>
+            <a:r>
+              <a:rPr lang="en-US" sz="1900" dirty="0">
+                <a:solidFill>
+                  <a:srgbClr val="1456F0"/>
+                </a:solidFill>
+                <a:latin typeface="Paperlogy 7 Bold" pitchFamily="34" charset="0"/>
+                <a:ea typeface="Paperlogy 7 Bold" pitchFamily="34" charset="-122"/>
+                <a:cs typeface="Paperlogy 7 Bold" pitchFamily="34" charset="-120"/>
+              </a:rPr>
+              <a:t>31 ms</a:t>
+            </a:r>
+            <a:endParaRPr lang="en-US" sz="1900" dirty="0"/>
+          </a:p>
+        </p:txBody>
+      </p:sp>
+      <p:sp>
+        <p:nvSpPr>
+          <p:cNvPr id="19" name="Text 17"/>
+          <p:cNvSpPr/>
+          <p:nvPr/>
+        </p:nvSpPr>
+        <p:spPr>
+          <a:xfrm>
+            <a:off x="2697480" y="4364736"/>
+            <a:ext cx="3023464" cy="606552"/>
+          </a:xfrm>
+          <a:prstGeom prst="rect">
+            <a:avLst/>
+          </a:prstGeom>
+          <a:noFill/>
+          <a:ln/>
+        </p:spPr>
+        <p:txBody>
+          <a:bodyPr wrap="square" lIns="0" tIns="0" rIns="0" bIns="0" rtlCol="0" anchor="ctr"/>
+          <a:lstStyle/>
+          <a:p>
+            <a:pPr indent="0" marL="0">
+              <a:lnSpc>
+                <a:spcPct val="134000"/>
+              </a:lnSpc>
+              <a:buNone/>
+            </a:pPr>
+            <a:r>
+              <a:rPr lang="en-US" sz="980" dirty="0">
+                <a:solidFill>
+                  <a:srgbClr val="45515E"/>
+                </a:solidFill>
+                <a:latin typeface="Paperlogy 4 Regular" pitchFamily="34" charset="0"/>
+                <a:ea typeface="Paperlogy 4 Regular" pitchFamily="34" charset="-122"/>
+                <a:cs typeface="Paperlogy 4 Regular" pitchFamily="34" charset="-120"/>
+              </a:rPr>
+              <a:t>TTFT p50 — 첫 토큰 지연이 매우 짧다.</a:t>
+            </a:r>
+            <a:endParaRPr lang="en-US" sz="980" dirty="0"/>
+          </a:p>
+        </p:txBody>
+      </p:sp>
+      <p:sp>
+        <p:nvSpPr>
+          <p:cNvPr id="20" name="Shape 18"/>
+          <p:cNvSpPr/>
+          <p:nvPr/>
+        </p:nvSpPr>
+        <p:spPr>
+          <a:xfrm>
+            <a:off x="694944" y="5026152"/>
+            <a:ext cx="5062576" cy="0"/>
+          </a:xfrm>
+          <a:prstGeom prst="line">
+            <a:avLst/>
+          </a:prstGeom>
+          <a:noFill/>
+          <a:ln w="12700">
+            <a:solidFill>
+              <a:srgbClr val="F2F3F5"/>
+            </a:solidFill>
+            <a:prstDash val="solid"/>
+          </a:ln>
+        </p:spPr>
+      </p:sp>
+      <p:sp>
+        <p:nvSpPr>
+          <p:cNvPr id="21" name="Shape 19"/>
+          <p:cNvSpPr/>
+          <p:nvPr/>
+        </p:nvSpPr>
+        <p:spPr>
+          <a:xfrm>
+            <a:off x="694944" y="5192268"/>
+            <a:ext cx="64008" cy="384048"/>
+          </a:xfrm>
+          <a:prstGeom prst="roundRect">
+            <a:avLst>
+              <a:gd name="adj" fmla="val 42857"/>
+            </a:avLst>
+          </a:prstGeom>
+          <a:solidFill>
+            <a:srgbClr val="1456F0"/>
+          </a:solidFill>
+          <a:ln/>
+        </p:spPr>
+      </p:sp>
+      <p:sp>
+        <p:nvSpPr>
+          <p:cNvPr id="22" name="Text 20"/>
+          <p:cNvSpPr/>
+          <p:nvPr/>
+        </p:nvSpPr>
+        <p:spPr>
+          <a:xfrm>
+            <a:off x="841248" y="5081016"/>
+            <a:ext cx="1783080" cy="606552"/>
+          </a:xfrm>
+          <a:prstGeom prst="rect">
+            <a:avLst/>
+          </a:prstGeom>
+          <a:noFill/>
+          <a:ln/>
+        </p:spPr>
+        <p:txBody>
+          <a:bodyPr wrap="square" lIns="0" tIns="0" rIns="0" bIns="0" rtlCol="0" anchor="ctr"/>
+          <a:lstStyle/>
+          <a:p>
+            <a:pPr indent="0" marL="0">
+              <a:buNone/>
+            </a:pPr>
+            <a:r>
+              <a:rPr lang="en-US" sz="1900" dirty="0">
+                <a:solidFill>
+                  <a:srgbClr val="1456F0"/>
+                </a:solidFill>
+                <a:latin typeface="Paperlogy 7 Bold" pitchFamily="34" charset="0"/>
+                <a:ea typeface="Paperlogy 7 Bold" pitchFamily="34" charset="-122"/>
+                <a:cs typeface="Paperlogy 7 Bold" pitchFamily="34" charset="-120"/>
+              </a:rPr>
+              <a:t>4,175 tok/s</a:t>
+            </a:r>
+            <a:endParaRPr lang="en-US" sz="1900" dirty="0"/>
+          </a:p>
+        </p:txBody>
+      </p:sp>
+      <p:sp>
+        <p:nvSpPr>
+          <p:cNvPr id="23" name="Text 21"/>
+          <p:cNvSpPr/>
+          <p:nvPr/>
+        </p:nvSpPr>
+        <p:spPr>
+          <a:xfrm>
+            <a:off x="2697480" y="5081016"/>
+            <a:ext cx="3023464" cy="606552"/>
+          </a:xfrm>
+          <a:prstGeom prst="rect">
+            <a:avLst/>
+          </a:prstGeom>
+          <a:noFill/>
+          <a:ln/>
+        </p:spPr>
+        <p:txBody>
+          <a:bodyPr wrap="square" lIns="0" tIns="0" rIns="0" bIns="0" rtlCol="0" anchor="ctr"/>
+          <a:lstStyle/>
+          <a:p>
+            <a:pPr indent="0" marL="0">
+              <a:lnSpc>
+                <a:spcPct val="134000"/>
+              </a:lnSpc>
+              <a:buNone/>
+            </a:pPr>
+            <a:r>
+              <a:rPr lang="en-US" sz="980" dirty="0">
+                <a:solidFill>
+                  <a:srgbClr val="45515E"/>
+                </a:solidFill>
+                <a:latin typeface="Paperlogy 4 Regular" pitchFamily="34" charset="0"/>
+                <a:ea typeface="Paperlogy 4 Regular" pitchFamily="34" charset="-122"/>
+                <a:cs typeface="Paperlogy 4 Regular" pitchFamily="34" charset="-120"/>
+              </a:rPr>
+              <a:t>동시성 c128 합산 처리량 · c1~128 전 구간 요청 실패 0건.</a:t>
+            </a:r>
+            <a:endParaRPr lang="en-US" sz="980" dirty="0"/>
+          </a:p>
+        </p:txBody>
+      </p:sp>
+      <p:sp>
+        <p:nvSpPr>
+          <p:cNvPr id="24" name="Shape 22"/>
+          <p:cNvSpPr/>
+          <p:nvPr/>
+        </p:nvSpPr>
+        <p:spPr>
+          <a:xfrm>
+            <a:off x="6196432" y="3099816"/>
+            <a:ext cx="5538064" cy="2660904"/>
+          </a:xfrm>
+          <a:prstGeom prst="roundRect">
+            <a:avLst>
+              <a:gd name="adj" fmla="val 4467"/>
+            </a:avLst>
+          </a:prstGeom>
+          <a:solidFill>
+            <a:srgbClr val="FFFFFF"/>
+          </a:solidFill>
+          <a:ln w="12700">
+            <a:solidFill>
+              <a:srgbClr val="F2F3F5"/>
+            </a:solidFill>
+            <a:prstDash val="solid"/>
+          </a:ln>
+          <a:effectLst>
+            <a:outerShdw sx="100000" sy="100000" kx="0" ky="0" algn="bl" rotWithShape="0" blurRad="76200" dist="25400" dir="5400000">
+              <a:srgbClr val="000000">
+                <a:alpha val="8000"/>
+              </a:srgbClr>
+            </a:outerShdw>
+          </a:effectLst>
+        </p:spPr>
+      </p:sp>
+      <p:sp>
+        <p:nvSpPr>
+          <p:cNvPr id="25" name="Text 23"/>
+          <p:cNvSpPr/>
+          <p:nvPr/>
+        </p:nvSpPr>
+        <p:spPr>
+          <a:xfrm>
+            <a:off x="6434176" y="3246120"/>
+            <a:ext cx="5080864" cy="274320"/>
+          </a:xfrm>
+          <a:prstGeom prst="rect">
+            <a:avLst/>
+          </a:prstGeom>
+          <a:noFill/>
+          <a:ln/>
+        </p:spPr>
+        <p:txBody>
+          <a:bodyPr wrap="square" lIns="0" tIns="0" rIns="0" bIns="0" rtlCol="0" anchor="ctr"/>
+          <a:lstStyle/>
+          <a:p>
+            <a:pPr indent="0" marL="0">
+              <a:buNone/>
+            </a:pPr>
+            <a:r>
+              <a:rPr lang="en-US" sz="1250" dirty="0">
+                <a:solidFill>
+                  <a:srgbClr val="EA5EC1"/>
+                </a:solidFill>
+                <a:latin typeface="Paperlogy 6 SemiBold" pitchFamily="34" charset="0"/>
+                <a:ea typeface="Paperlogy 6 SemiBold" pitchFamily="34" charset="-122"/>
+                <a:cs typeface="Paperlogy 6 SemiBold" pitchFamily="34" charset="-120"/>
+              </a:rPr>
+              <a:t>한계 — 컨텍스트 4,096 토큰</a:t>
+            </a:r>
+            <a:endParaRPr lang="en-US" sz="1250" dirty="0"/>
+          </a:p>
+        </p:txBody>
+      </p:sp>
+      <p:sp>
+        <p:nvSpPr>
+          <p:cNvPr id="26" name="Shape 24"/>
+          <p:cNvSpPr/>
+          <p:nvPr/>
+        </p:nvSpPr>
+        <p:spPr>
+          <a:xfrm>
+            <a:off x="6434176" y="3759708"/>
+            <a:ext cx="64008" cy="384048"/>
+          </a:xfrm>
+          <a:prstGeom prst="roundRect">
+            <a:avLst>
+              <a:gd name="adj" fmla="val 42857"/>
+            </a:avLst>
+          </a:prstGeom>
+          <a:solidFill>
+            <a:srgbClr val="EA5EC1"/>
+          </a:solidFill>
+          <a:ln/>
+        </p:spPr>
+      </p:sp>
+      <p:sp>
+        <p:nvSpPr>
+          <p:cNvPr id="27" name="Text 25"/>
+          <p:cNvSpPr/>
+          <p:nvPr/>
+        </p:nvSpPr>
+        <p:spPr>
+          <a:xfrm>
+            <a:off x="6580480" y="3648456"/>
+            <a:ext cx="1783080" cy="606552"/>
+          </a:xfrm>
+          <a:prstGeom prst="rect">
+            <a:avLst/>
+          </a:prstGeom>
+          <a:noFill/>
+          <a:ln/>
+        </p:spPr>
+        <p:txBody>
+          <a:bodyPr wrap="square" lIns="0" tIns="0" rIns="0" bIns="0" rtlCol="0" anchor="ctr"/>
+          <a:lstStyle/>
+          <a:p>
+            <a:pPr indent="0" marL="0">
+              <a:buNone/>
+            </a:pPr>
+            <a:r>
+              <a:rPr lang="en-US" sz="1900" dirty="0">
+                <a:solidFill>
+                  <a:srgbClr val="EA5EC1"/>
+                </a:solidFill>
+                <a:latin typeface="Paperlogy 7 Bold" pitchFamily="34" charset="0"/>
+                <a:ea typeface="Paperlogy 7 Bold" pitchFamily="34" charset="-122"/>
+                <a:cs typeface="Paperlogy 7 Bold" pitchFamily="34" charset="-120"/>
+              </a:rPr>
+              <a:t>4,096</a:t>
+            </a:r>
+            <a:endParaRPr lang="en-US" sz="1900" dirty="0"/>
+          </a:p>
+        </p:txBody>
+      </p:sp>
+      <p:sp>
+        <p:nvSpPr>
+          <p:cNvPr id="28" name="Text 26"/>
+          <p:cNvSpPr/>
+          <p:nvPr/>
+        </p:nvSpPr>
+        <p:spPr>
+          <a:xfrm>
+            <a:off x="8436712" y="3648456"/>
+            <a:ext cx="3023464" cy="606552"/>
+          </a:xfrm>
+          <a:prstGeom prst="rect">
+            <a:avLst/>
+          </a:prstGeom>
+          <a:noFill/>
+          <a:ln/>
+        </p:spPr>
+        <p:txBody>
+          <a:bodyPr wrap="square" lIns="0" tIns="0" rIns="0" bIns="0" rtlCol="0" anchor="ctr"/>
+          <a:lstStyle/>
+          <a:p>
+            <a:pPr indent="0" marL="0">
+              <a:lnSpc>
+                <a:spcPct val="134000"/>
+              </a:lnSpc>
+              <a:buNone/>
+            </a:pPr>
+            <a:r>
+              <a:rPr lang="en-US" sz="980" dirty="0">
+                <a:solidFill>
+                  <a:srgbClr val="45515E"/>
+                </a:solidFill>
+                <a:latin typeface="Paperlogy 4 Regular" pitchFamily="34" charset="0"/>
+                <a:ea typeface="Paperlogy 4 Regular" pitchFamily="34" charset="-122"/>
+                <a:cs typeface="Paperlogy 4 Regular" pitchFamily="34" charset="-120"/>
+              </a:rPr>
+              <a:t>max_context_len — prebuilt 아티팩트에 고정 컴파일된 버킷 (8B는 128K).</a:t>
+            </a:r>
+            <a:endParaRPr lang="en-US" sz="980" dirty="0"/>
+          </a:p>
+        </p:txBody>
+      </p:sp>
+      <p:sp>
+        <p:nvSpPr>
+          <p:cNvPr id="29" name="Shape 27"/>
+          <p:cNvSpPr/>
+          <p:nvPr/>
+        </p:nvSpPr>
+        <p:spPr>
+          <a:xfrm>
+            <a:off x="6434176" y="4309872"/>
+            <a:ext cx="5062576" cy="0"/>
+          </a:xfrm>
+          <a:prstGeom prst="line">
+            <a:avLst/>
+          </a:prstGeom>
+          <a:noFill/>
+          <a:ln w="12700">
+            <a:solidFill>
+              <a:srgbClr val="F2F3F5"/>
+            </a:solidFill>
+            <a:prstDash val="solid"/>
+          </a:ln>
+        </p:spPr>
+      </p:sp>
+      <p:sp>
+        <p:nvSpPr>
+          <p:cNvPr id="30" name="Shape 28"/>
+          <p:cNvSpPr/>
+          <p:nvPr/>
+        </p:nvSpPr>
+        <p:spPr>
+          <a:xfrm>
+            <a:off x="6434176" y="4475988"/>
+            <a:ext cx="64008" cy="384048"/>
+          </a:xfrm>
+          <a:prstGeom prst="roundRect">
+            <a:avLst>
+              <a:gd name="adj" fmla="val 42857"/>
+            </a:avLst>
+          </a:prstGeom>
+          <a:solidFill>
+            <a:srgbClr val="EA5EC1"/>
+          </a:solidFill>
+          <a:ln/>
+        </p:spPr>
+      </p:sp>
+      <p:sp>
+        <p:nvSpPr>
+          <p:cNvPr id="31" name="Text 29"/>
+          <p:cNvSpPr/>
+          <p:nvPr/>
+        </p:nvSpPr>
+        <p:spPr>
+          <a:xfrm>
+            <a:off x="6580480" y="4364736"/>
+            <a:ext cx="1783080" cy="606552"/>
+          </a:xfrm>
+          <a:prstGeom prst="rect">
+            <a:avLst/>
+          </a:prstGeom>
+          <a:noFill/>
+          <a:ln/>
+        </p:spPr>
+        <p:txBody>
+          <a:bodyPr wrap="square" lIns="0" tIns="0" rIns="0" bIns="0" rtlCol="0" anchor="ctr"/>
+          <a:lstStyle/>
+          <a:p>
+            <a:pPr indent="0" marL="0">
+              <a:buNone/>
+            </a:pPr>
+            <a:r>
+              <a:rPr lang="en-US" sz="1900" dirty="0">
+                <a:solidFill>
+                  <a:srgbClr val="EA5EC1"/>
+                </a:solidFill>
+                <a:latin typeface="Paperlogy 7 Bold" pitchFamily="34" charset="0"/>
+                <a:ea typeface="Paperlogy 7 Bold" pitchFamily="34" charset="-122"/>
+                <a:cs typeface="Paperlogy 7 Bold" pitchFamily="34" charset="-120"/>
+              </a:rPr>
+              <a:t>0 / 50</a:t>
+            </a:r>
+            <a:endParaRPr lang="en-US" sz="1900" dirty="0"/>
+          </a:p>
+        </p:txBody>
+      </p:sp>
+      <p:sp>
+        <p:nvSpPr>
+          <p:cNvPr id="32" name="Text 30"/>
+          <p:cNvSpPr/>
+          <p:nvPr/>
+        </p:nvSpPr>
+        <p:spPr>
+          <a:xfrm>
+            <a:off x="8436712" y="4364736"/>
+            <a:ext cx="3023464" cy="606552"/>
+          </a:xfrm>
+          <a:prstGeom prst="rect">
+            <a:avLst/>
+          </a:prstGeom>
+          <a:noFill/>
+          <a:ln/>
+        </p:spPr>
+        <p:txBody>
+          <a:bodyPr wrap="square" lIns="0" tIns="0" rIns="0" bIns="0" rtlCol="0" anchor="ctr"/>
+          <a:lstStyle/>
+          <a:p>
+            <a:pPr indent="0" marL="0">
+              <a:lnSpc>
+                <a:spcPct val="134000"/>
+              </a:lnSpc>
+              <a:buNone/>
+            </a:pPr>
+            <a:r>
+              <a:rPr lang="en-US" sz="980" dirty="0">
+                <a:solidFill>
+                  <a:srgbClr val="45515E"/>
+                </a:solidFill>
+                <a:latin typeface="Paperlogy 4 Regular" pitchFamily="34" charset="0"/>
+                <a:ea typeface="Paperlogy 4 Regular" pitchFamily="34" charset="-122"/>
+                <a:cs typeface="Paperlogy 4 Regular" pitchFamily="34" charset="-120"/>
+              </a:rPr>
+              <a:t>SWE-bench — oracle 프롬프트(3K~10K+)가 4096 초과 → 50건 전부 거부, 패치 0.</a:t>
+            </a:r>
+            <a:endParaRPr lang="en-US" sz="980" dirty="0"/>
+          </a:p>
+        </p:txBody>
+      </p:sp>
+      <p:sp>
+        <p:nvSpPr>
+          <p:cNvPr id="33" name="Shape 31"/>
+          <p:cNvSpPr/>
+          <p:nvPr/>
+        </p:nvSpPr>
+        <p:spPr>
+          <a:xfrm>
+            <a:off x="6434176" y="5026152"/>
+            <a:ext cx="5062576" cy="0"/>
+          </a:xfrm>
+          <a:prstGeom prst="line">
+            <a:avLst/>
+          </a:prstGeom>
+          <a:noFill/>
+          <a:ln w="12700">
+            <a:solidFill>
+              <a:srgbClr val="F2F3F5"/>
+            </a:solidFill>
+            <a:prstDash val="solid"/>
+          </a:ln>
+        </p:spPr>
+      </p:sp>
+      <p:sp>
+        <p:nvSpPr>
+          <p:cNvPr id="34" name="Shape 32"/>
+          <p:cNvSpPr/>
+          <p:nvPr/>
+        </p:nvSpPr>
+        <p:spPr>
+          <a:xfrm>
+            <a:off x="6434176" y="5192268"/>
+            <a:ext cx="64008" cy="384048"/>
+          </a:xfrm>
+          <a:prstGeom prst="roundRect">
+            <a:avLst>
+              <a:gd name="adj" fmla="val 42857"/>
+            </a:avLst>
+          </a:prstGeom>
+          <a:solidFill>
+            <a:srgbClr val="EA5EC1"/>
+          </a:solidFill>
+          <a:ln/>
+        </p:spPr>
+      </p:sp>
+      <p:sp>
+        <p:nvSpPr>
+          <p:cNvPr id="35" name="Text 33"/>
+          <p:cNvSpPr/>
+          <p:nvPr/>
+        </p:nvSpPr>
+        <p:spPr>
+          <a:xfrm>
+            <a:off x="6580480" y="5081016"/>
+            <a:ext cx="1783080" cy="606552"/>
+          </a:xfrm>
+          <a:prstGeom prst="rect">
+            <a:avLst/>
+          </a:prstGeom>
+          <a:noFill/>
+          <a:ln/>
+        </p:spPr>
+        <p:txBody>
+          <a:bodyPr wrap="square" lIns="0" tIns="0" rIns="0" bIns="0" rtlCol="0" anchor="ctr"/>
+          <a:lstStyle/>
+          <a:p>
+            <a:pPr indent="0" marL="0">
+              <a:buNone/>
+            </a:pPr>
+            <a:r>
+              <a:rPr lang="en-US" sz="1900" dirty="0">
+                <a:solidFill>
+                  <a:srgbClr val="EA5EC1"/>
+                </a:solidFill>
+                <a:latin typeface="Paperlogy 7 Bold" pitchFamily="34" charset="0"/>
+                <a:ea typeface="Paperlogy 7 Bold" pitchFamily="34" charset="-122"/>
+                <a:cs typeface="Paperlogy 7 Bold" pitchFamily="34" charset="-120"/>
+              </a:rPr>
+              <a:t>0 성공</a:t>
+            </a:r>
+            <a:endParaRPr lang="en-US" sz="1900" dirty="0"/>
+          </a:p>
+        </p:txBody>
+      </p:sp>
+      <p:sp>
+        <p:nvSpPr>
+          <p:cNvPr id="36" name="Text 34"/>
+          <p:cNvSpPr/>
+          <p:nvPr/>
+        </p:nvSpPr>
+        <p:spPr>
+          <a:xfrm>
+            <a:off x="8436712" y="5081016"/>
+            <a:ext cx="3023464" cy="606552"/>
+          </a:xfrm>
+          <a:prstGeom prst="rect">
+            <a:avLst/>
+          </a:prstGeom>
+          <a:noFill/>
+          <a:ln/>
+        </p:spPr>
+        <p:txBody>
+          <a:bodyPr wrap="square" lIns="0" tIns="0" rIns="0" bIns="0" rtlCol="0" anchor="ctr"/>
+          <a:lstStyle/>
+          <a:p>
+            <a:pPr indent="0" marL="0">
+              <a:lnSpc>
+                <a:spcPct val="134000"/>
+              </a:lnSpc>
+              <a:buNone/>
+            </a:pPr>
+            <a:r>
+              <a:rPr lang="en-US" sz="980" dirty="0">
+                <a:solidFill>
+                  <a:srgbClr val="45515E"/>
+                </a:solidFill>
+                <a:latin typeface="Paperlogy 4 Regular" pitchFamily="34" charset="0"/>
+                <a:ea typeface="Paperlogy 4 Regular" pitchFamily="34" charset="-122"/>
+                <a:cs typeface="Paperlogy 4 Regular" pitchFamily="34" charset="-120"/>
+              </a:rPr>
+              <a:t>sweep prompt=4096 — prompt+max_tokens가 버킷을 넘겨 전 동시성 실패.</a:t>
+            </a:r>
+            <a:endParaRPr lang="en-US" sz="980" dirty="0"/>
+          </a:p>
+        </p:txBody>
+      </p:sp>
+      <p:sp>
+        <p:nvSpPr>
+          <p:cNvPr id="37" name="Shape 35"/>
+          <p:cNvSpPr/>
+          <p:nvPr/>
+        </p:nvSpPr>
+        <p:spPr>
+          <a:xfrm>
+            <a:off x="457200" y="5779008"/>
+            <a:ext cx="11277295" cy="457200"/>
+          </a:xfrm>
+          <a:prstGeom prst="roundRect">
+            <a:avLst>
+              <a:gd name="adj" fmla="val 26000"/>
+            </a:avLst>
+          </a:prstGeom>
+          <a:solidFill>
+            <a:srgbClr val="F0F0F0"/>
+          </a:solidFill>
+          <a:ln/>
+        </p:spPr>
+      </p:sp>
+      <p:sp>
+        <p:nvSpPr>
+          <p:cNvPr id="38" name="Text 36"/>
+          <p:cNvSpPr/>
+          <p:nvPr/>
+        </p:nvSpPr>
+        <p:spPr>
+          <a:xfrm>
+            <a:off x="731520" y="5779008"/>
+            <a:ext cx="10698480" cy="457200"/>
+          </a:xfrm>
+          <a:prstGeom prst="rect">
+            <a:avLst/>
+          </a:prstGeom>
+          <a:noFill/>
+          <a:ln/>
+        </p:spPr>
+        <p:txBody>
+          <a:bodyPr wrap="square" lIns="0" tIns="0" rIns="0" bIns="0" rtlCol="0" anchor="ctr"/>
+          <a:lstStyle/>
+          <a:p>
+            <a:pPr indent="0" marL="0">
+              <a:buNone/>
+            </a:pPr>
+            <a:r>
+              <a:rPr lang="en-US" sz="1050" dirty="0">
+                <a:solidFill>
+                  <a:srgbClr val="1456F0"/>
+                </a:solidFill>
+                <a:latin typeface="Paperlogy 7 Bold" pitchFamily="34" charset="0"/>
+                <a:ea typeface="Paperlogy 7 Bold" pitchFamily="34" charset="-122"/>
+                <a:cs typeface="Paperlogy 7 Bold" pitchFamily="34" charset="-120"/>
+              </a:rPr>
+              <a:t>시사점  </a:t>
+            </a:r>
+            <a:pPr indent="0" marL="0">
+              <a:buNone/>
+            </a:pPr>
+            <a:r>
+              <a:rPr lang="en-US" sz="1050" dirty="0">
+                <a:solidFill>
+                  <a:srgbClr val="45515E"/>
+                </a:solidFill>
+                <a:latin typeface="Paperlogy 5 Medium" pitchFamily="34" charset="0"/>
+                <a:ea typeface="Paperlogy 5 Medium" pitchFamily="34" charset="-122"/>
+                <a:cs typeface="Paperlogy 5 Medium" pitchFamily="34" charset="-120"/>
+              </a:rPr>
+              <a:t>smoke·단문 고처리량 데모엔 적합 · 코드 생성·긴 컨텍스트 작업엔 부적합 — 실사용하려면 아티팩트를 더 큰 컨텍스트 버킷으로 재컴파일해야 한다.</a:t>
+            </a:r>
+            <a:endParaRPr lang="en-US" sz="1050" dirty="0"/>
+          </a:p>
+        </p:txBody>
+      </p:sp>
+    </p:spTree>
+  </p:cSld>
+  <p:clrMapOvr>
+    <a:masterClrMapping/>
+  </p:clrMapOvr>
+</p:sld>
+</file>
+
+<file path=ppt/slides/slide17.xml><?xml version="1.0" encoding="utf-8"?>
+<p:sld xmlns:a="http://schemas.openxmlformats.org/drawingml/2006/main" xmlns:r="http://schemas.openxmlformats.org/officeDocument/2006/relationships" xmlns:p="http://schemas.openxmlformats.org/presentationml/2006/main">
+  <p:cSld name="Slide 17">
+    <p:bg>
+      <p:bgPr>
+        <a:solidFill>
+          <a:srgbClr val="FFFFFF"/>
+        </a:solidFill>
+      </p:bgPr>
+    </p:bg>
+    <p:spTree>
+      <p:nvGrpSpPr>
+        <p:cNvPr id="1" name=""/>
+        <p:cNvGrpSpPr/>
+        <p:nvPr/>
+      </p:nvGrpSpPr>
+      <p:grpSpPr>
+        <a:xfrm>
+          <a:off x="0" y="0"/>
+          <a:ext cx="0" cy="0"/>
+          <a:chOff x="0" y="0"/>
+          <a:chExt cx="0" cy="0"/>
+        </a:xfrm>
+      </p:grpSpPr>
+      <p:sp>
+        <p:nvSpPr>
+          <p:cNvPr id="2" name="Text 0"/>
+          <p:cNvSpPr/>
+          <p:nvPr/>
+        </p:nvSpPr>
+        <p:spPr>
+          <a:xfrm>
+            <a:off x="457200" y="365760"/>
+            <a:ext cx="8229600" cy="274320"/>
+          </a:xfrm>
+          <a:prstGeom prst="rect">
+            <a:avLst/>
+          </a:prstGeom>
+          <a:noFill/>
+          <a:ln/>
+        </p:spPr>
+        <p:txBody>
+          <a:bodyPr wrap="square" lIns="0" tIns="0" rIns="0" bIns="0" rtlCol="0" anchor="ctr"/>
+          <a:lstStyle/>
+          <a:p>
+            <a:pPr indent="0" marL="0">
+              <a:buNone/>
+            </a:pPr>
+            <a:r>
+              <a:rPr lang="en-US" sz="1200" spc="80" kern="0" dirty="0">
+                <a:solidFill>
+                  <a:srgbClr val="8E8E93"/>
+                </a:solidFill>
+                <a:latin typeface="Paperlogy 6 SemiBold" pitchFamily="34" charset="0"/>
+                <a:ea typeface="Paperlogy 6 SemiBold" pitchFamily="34" charset="-122"/>
+                <a:cs typeface="Paperlogy 6 SemiBold" pitchFamily="34" charset="-120"/>
+              </a:rPr>
+              <a:t>TEST 5 · EMBEDDING</a:t>
+            </a:r>
+            <a:endParaRPr lang="en-US" sz="1200" dirty="0"/>
+          </a:p>
+        </p:txBody>
+      </p:sp>
+      <p:sp>
+        <p:nvSpPr>
+          <p:cNvPr id="3" name="Text 1"/>
+          <p:cNvSpPr/>
+          <p:nvPr/>
+        </p:nvSpPr>
+        <p:spPr>
+          <a:xfrm>
+            <a:off x="457200" y="6446520"/>
+            <a:ext cx="2743200" cy="228600"/>
+          </a:xfrm>
+          <a:prstGeom prst="rect">
+            <a:avLst/>
+          </a:prstGeom>
+          <a:noFill/>
+          <a:ln/>
+        </p:spPr>
+        <p:txBody>
+          <a:bodyPr wrap="square" lIns="0" tIns="0" rIns="0" bIns="0" rtlCol="0" anchor="ctr"/>
+          <a:lstStyle/>
+          <a:p>
+            <a:pPr indent="0" marL="0">
+              <a:buNone/>
+            </a:pPr>
+            <a:r>
+              <a:rPr lang="en-US" sz="1000" dirty="0">
+                <a:solidFill>
+                  <a:srgbClr val="8E8E93"/>
+                </a:solidFill>
+                <a:latin typeface="Paperlogy 5 Medium" pitchFamily="34" charset="0"/>
+                <a:ea typeface="Paperlogy 5 Medium" pitchFamily="34" charset="-122"/>
+                <a:cs typeface="Paperlogy 5 Medium" pitchFamily="34" charset="-120"/>
+              </a:rPr>
+              <a:t>17 / 18</a:t>
+            </a:r>
+            <a:endParaRPr lang="en-US" sz="1000" dirty="0"/>
+          </a:p>
+        </p:txBody>
+      </p:sp>
+      <p:sp>
+        <p:nvSpPr>
+          <p:cNvPr id="4" name="Text 2"/>
+          <p:cNvSpPr/>
+          <p:nvPr/>
+        </p:nvSpPr>
+        <p:spPr>
+          <a:xfrm>
+            <a:off x="4419295" y="6446520"/>
+            <a:ext cx="7315200" cy="228600"/>
+          </a:xfrm>
+          <a:prstGeom prst="rect">
+            <a:avLst/>
+          </a:prstGeom>
+          <a:noFill/>
+          <a:ln/>
+        </p:spPr>
+        <p:txBody>
+          <a:bodyPr wrap="square" lIns="0" tIns="0" rIns="0" bIns="0" rtlCol="0" anchor="ctr"/>
+          <a:lstStyle/>
+          <a:p>
+            <a:pPr algn="r" indent="0" marL="0">
+              <a:buNone/>
+            </a:pPr>
+            <a:r>
+              <a:rPr lang="en-US" sz="950" dirty="0">
+                <a:solidFill>
+                  <a:srgbClr val="8E8E93"/>
+                </a:solidFill>
+                <a:latin typeface="Paperlogy 4 Regular" pitchFamily="34" charset="0"/>
+                <a:ea typeface="Paperlogy 4 Regular" pitchFamily="34" charset="-122"/>
+                <a:cs typeface="Paperlogy 4 Regular" pitchFamily="34" charset="-120"/>
+              </a:rPr>
+              <a:t>출처: bench/results · embed / rerank task</a:t>
+            </a:r>
+            <a:endParaRPr lang="en-US" sz="950" dirty="0"/>
+          </a:p>
+        </p:txBody>
+      </p:sp>
+      <p:sp>
+        <p:nvSpPr>
+          <p:cNvPr id="5" name="Text 3"/>
+          <p:cNvSpPr/>
+          <p:nvPr/>
+        </p:nvSpPr>
+        <p:spPr>
+          <a:xfrm>
+            <a:off x="457200" y="914400"/>
+            <a:ext cx="11277295" cy="640080"/>
+          </a:xfrm>
+          <a:prstGeom prst="rect">
+            <a:avLst/>
+          </a:prstGeom>
+          <a:noFill/>
+          <a:ln/>
+        </p:spPr>
+        <p:txBody>
+          <a:bodyPr wrap="square" lIns="0" tIns="0" rIns="0" bIns="0" rtlCol="0" anchor="ctr"/>
+          <a:lstStyle/>
+          <a:p>
+            <a:pPr indent="0" marL="0">
+              <a:lnSpc>
+                <a:spcPct val="118000"/>
+              </a:lnSpc>
+              <a:buNone/>
+            </a:pPr>
+            <a:r>
+              <a:rPr lang="en-US" sz="3100" spc="-60" kern="0" dirty="0">
+                <a:solidFill>
+                  <a:srgbClr val="222222"/>
+                </a:solidFill>
+                <a:latin typeface="Paperlogy 7 Bold" pitchFamily="34" charset="0"/>
+                <a:ea typeface="Paperlogy 7 Bold" pitchFamily="34" charset="-122"/>
+                <a:cs typeface="Paperlogy 7 Bold" pitchFamily="34" charset="-120"/>
+              </a:rPr>
+              <a:t>테스트 5 — 임베딩 · 리랭커</a:t>
+            </a:r>
+            <a:endParaRPr lang="en-US" sz="3100" dirty="0"/>
+          </a:p>
+        </p:txBody>
+      </p:sp>
+      <p:sp>
+        <p:nvSpPr>
+          <p:cNvPr id="6" name="Text 4"/>
+          <p:cNvSpPr/>
+          <p:nvPr/>
+        </p:nvSpPr>
+        <p:spPr>
+          <a:xfrm>
+            <a:off x="457200" y="1581912"/>
+            <a:ext cx="11277295" cy="365760"/>
+          </a:xfrm>
+          <a:prstGeom prst="rect">
+            <a:avLst/>
+          </a:prstGeom>
+          <a:noFill/>
+          <a:ln/>
+        </p:spPr>
+        <p:txBody>
+          <a:bodyPr wrap="square" lIns="0" tIns="0" rIns="0" bIns="0" rtlCol="0" anchor="ctr"/>
+          <a:lstStyle/>
+          <a:p>
+            <a:pPr indent="0" marL="0">
+              <a:lnSpc>
+                <a:spcPct val="140000"/>
+              </a:lnSpc>
+              <a:buNone/>
+            </a:pPr>
+            <a:r>
+              <a:rPr lang="en-US" sz="1500" dirty="0">
+                <a:solidFill>
+                  <a:srgbClr val="45515E"/>
+                </a:solidFill>
+                <a:latin typeface="Paperlogy 5 Medium" pitchFamily="34" charset="0"/>
+                <a:ea typeface="Paperlogy 5 Medium" pitchFamily="34" charset="-122"/>
+                <a:cs typeface="Paperlogy 5 Medium" pitchFamily="34" charset="-120"/>
+              </a:rPr>
+              <a:t>검색 보조 모델(Qwen3-Embedding-8B · Qwen3-Reranker-8B)의 처리량 측정</a:t>
+            </a:r>
+            <a:endParaRPr lang="en-US" sz="1500" dirty="0"/>
+          </a:p>
+        </p:txBody>
+      </p:sp>
+      <p:sp>
+        <p:nvSpPr>
+          <p:cNvPr id="7" name="Shape 5"/>
+          <p:cNvSpPr/>
+          <p:nvPr/>
+        </p:nvSpPr>
+        <p:spPr>
+          <a:xfrm>
+            <a:off x="457200" y="2185416"/>
+            <a:ext cx="3637178" cy="1097280"/>
+          </a:xfrm>
+          <a:prstGeom prst="roundRect">
+            <a:avLst>
+              <a:gd name="adj" fmla="val 10833"/>
+            </a:avLst>
+          </a:prstGeom>
+          <a:solidFill>
+            <a:srgbClr val="FFFFFF"/>
+          </a:solidFill>
+          <a:ln w="12700">
+            <a:solidFill>
+              <a:srgbClr val="F2F3F5"/>
+            </a:solidFill>
+            <a:prstDash val="solid"/>
+          </a:ln>
+          <a:effectLst>
+            <a:outerShdw sx="100000" sy="100000" kx="0" ky="0" algn="bl" rotWithShape="0" blurRad="76200" dist="25400" dir="5400000">
+              <a:srgbClr val="000000">
+                <a:alpha val="8000"/>
+              </a:srgbClr>
+            </a:outerShdw>
+          </a:effectLst>
+        </p:spPr>
+      </p:sp>
+      <p:sp>
+        <p:nvSpPr>
+          <p:cNvPr id="8" name="Shape 6"/>
+          <p:cNvSpPr/>
+          <p:nvPr/>
+        </p:nvSpPr>
+        <p:spPr>
+          <a:xfrm>
+            <a:off x="640080" y="2331720"/>
+            <a:ext cx="490118" cy="256032"/>
+          </a:xfrm>
+          <a:prstGeom prst="roundRect">
+            <a:avLst>
+              <a:gd name="adj" fmla="val 50000"/>
+            </a:avLst>
+          </a:prstGeom>
+          <a:solidFill>
+            <a:srgbClr val="8E8E93"/>
+          </a:solidFill>
+          <a:ln/>
+        </p:spPr>
+      </p:sp>
+      <p:sp>
+        <p:nvSpPr>
+          <p:cNvPr id="9" name="Text 7"/>
+          <p:cNvSpPr/>
+          <p:nvPr/>
+        </p:nvSpPr>
+        <p:spPr>
+          <a:xfrm>
+            <a:off x="640080" y="2331720"/>
+            <a:ext cx="490118" cy="256032"/>
+          </a:xfrm>
+          <a:prstGeom prst="rect">
+            <a:avLst/>
+          </a:prstGeom>
+          <a:noFill/>
+          <a:ln/>
+        </p:spPr>
+        <p:txBody>
+          <a:bodyPr wrap="square" lIns="0" tIns="0" rIns="0" bIns="0" rtlCol="0" anchor="ctr"/>
+          <a:lstStyle/>
+          <a:p>
+            <a:pPr algn="ctr" indent="0" marL="0">
+              <a:buNone/>
+            </a:pPr>
+            <a:r>
+              <a:rPr lang="en-US" sz="950" dirty="0">
+                <a:solidFill>
+                  <a:srgbClr val="FFFFFF"/>
+                </a:solidFill>
+                <a:latin typeface="Paperlogy 6 SemiBold" pitchFamily="34" charset="0"/>
+                <a:ea typeface="Paperlogy 6 SemiBold" pitchFamily="34" charset="-122"/>
+                <a:cs typeface="Paperlogy 6 SemiBold" pitchFamily="34" charset="-120"/>
+              </a:rPr>
+              <a:t>무엇을</a:t>
+            </a:r>
+            <a:endParaRPr lang="en-US" sz="950" dirty="0"/>
+          </a:p>
+        </p:txBody>
+      </p:sp>
+      <p:sp>
+        <p:nvSpPr>
+          <p:cNvPr id="10" name="Text 8"/>
+          <p:cNvSpPr/>
+          <p:nvPr/>
+        </p:nvSpPr>
+        <p:spPr>
+          <a:xfrm>
+            <a:off x="640080" y="2642616"/>
+            <a:ext cx="3271418" cy="530352"/>
+          </a:xfrm>
+          <a:prstGeom prst="rect">
+            <a:avLst/>
+          </a:prstGeom>
+          <a:noFill/>
+          <a:ln/>
+        </p:spPr>
+        <p:txBody>
+          <a:bodyPr wrap="square" lIns="0" tIns="0" rIns="0" bIns="0" rtlCol="0" anchor="ctr"/>
+          <a:lstStyle/>
+          <a:p>
+            <a:pPr indent="0" marL="0">
+              <a:lnSpc>
+                <a:spcPct val="134000"/>
+              </a:lnSpc>
+              <a:buNone/>
+            </a:pPr>
+            <a:r>
+              <a:rPr lang="en-US" sz="980" dirty="0">
+                <a:solidFill>
+                  <a:srgbClr val="45515E"/>
+                </a:solidFill>
+                <a:latin typeface="Paperlogy 4 Regular" pitchFamily="34" charset="0"/>
+                <a:ea typeface="Paperlogy 4 Regular" pitchFamily="34" charset="-122"/>
+                <a:cs typeface="Paperlogy 4 Regular" pitchFamily="34" charset="-120"/>
+              </a:rPr>
+              <a:t>임베딩/리랭킹 처리량 — SWE-bench 검색 보조에 쓰이는 모델.</a:t>
+            </a:r>
+            <a:endParaRPr lang="en-US" sz="980" dirty="0"/>
+          </a:p>
+        </p:txBody>
+      </p:sp>
+      <p:sp>
+        <p:nvSpPr>
+          <p:cNvPr id="11" name="Shape 9"/>
+          <p:cNvSpPr/>
+          <p:nvPr/>
+        </p:nvSpPr>
+        <p:spPr>
+          <a:xfrm>
+            <a:off x="4277258" y="2185416"/>
+            <a:ext cx="3637178" cy="1097280"/>
+          </a:xfrm>
+          <a:prstGeom prst="roundRect">
+            <a:avLst>
+              <a:gd name="adj" fmla="val 10833"/>
+            </a:avLst>
+          </a:prstGeom>
+          <a:solidFill>
+            <a:srgbClr val="FFFFFF"/>
+          </a:solidFill>
+          <a:ln w="12700">
+            <a:solidFill>
+              <a:srgbClr val="F2F3F5"/>
+            </a:solidFill>
+            <a:prstDash val="solid"/>
+          </a:ln>
+          <a:effectLst>
+            <a:outerShdw sx="100000" sy="100000" kx="0" ky="0" algn="bl" rotWithShape="0" blurRad="76200" dist="25400" dir="5400000">
+              <a:srgbClr val="000000">
+                <a:alpha val="8000"/>
+              </a:srgbClr>
+            </a:outerShdw>
+          </a:effectLst>
+        </p:spPr>
+      </p:sp>
+      <p:sp>
+        <p:nvSpPr>
+          <p:cNvPr id="12" name="Shape 10"/>
+          <p:cNvSpPr/>
+          <p:nvPr/>
+        </p:nvSpPr>
+        <p:spPr>
+          <a:xfrm>
+            <a:off x="4460138" y="2331720"/>
+            <a:ext cx="405994" cy="256032"/>
+          </a:xfrm>
+          <a:prstGeom prst="roundRect">
+            <a:avLst>
+              <a:gd name="adj" fmla="val 50000"/>
+            </a:avLst>
+          </a:prstGeom>
+          <a:solidFill>
+            <a:srgbClr val="8E8E93"/>
+          </a:solidFill>
+          <a:ln/>
+        </p:spPr>
+      </p:sp>
+      <p:sp>
+        <p:nvSpPr>
+          <p:cNvPr id="13" name="Text 11"/>
+          <p:cNvSpPr/>
+          <p:nvPr/>
+        </p:nvSpPr>
+        <p:spPr>
+          <a:xfrm>
+            <a:off x="4460138" y="2331720"/>
+            <a:ext cx="405994" cy="256032"/>
+          </a:xfrm>
+          <a:prstGeom prst="rect">
+            <a:avLst/>
+          </a:prstGeom>
+          <a:noFill/>
+          <a:ln/>
+        </p:spPr>
+        <p:txBody>
+          <a:bodyPr wrap="square" lIns="0" tIns="0" rIns="0" bIns="0" rtlCol="0" anchor="ctr"/>
+          <a:lstStyle/>
+          <a:p>
+            <a:pPr algn="ctr" indent="0" marL="0">
+              <a:buNone/>
+            </a:pPr>
+            <a:r>
+              <a:rPr lang="en-US" sz="950" dirty="0">
+                <a:solidFill>
+                  <a:srgbClr val="FFFFFF"/>
+                </a:solidFill>
+                <a:latin typeface="Paperlogy 6 SemiBold" pitchFamily="34" charset="0"/>
+                <a:ea typeface="Paperlogy 6 SemiBold" pitchFamily="34" charset="-122"/>
+                <a:cs typeface="Paperlogy 6 SemiBold" pitchFamily="34" charset="-120"/>
+              </a:rPr>
+              <a:t>입력</a:t>
+            </a:r>
+            <a:endParaRPr lang="en-US" sz="950" dirty="0"/>
+          </a:p>
+        </p:txBody>
+      </p:sp>
+      <p:sp>
+        <p:nvSpPr>
+          <p:cNvPr id="14" name="Text 12"/>
+          <p:cNvSpPr/>
+          <p:nvPr/>
+        </p:nvSpPr>
+        <p:spPr>
+          <a:xfrm>
+            <a:off x="4460138" y="2642616"/>
+            <a:ext cx="3271418" cy="530352"/>
+          </a:xfrm>
+          <a:prstGeom prst="rect">
+            <a:avLst/>
+          </a:prstGeom>
+          <a:noFill/>
+          <a:ln/>
+        </p:spPr>
+        <p:txBody>
+          <a:bodyPr wrap="square" lIns="0" tIns="0" rIns="0" bIns="0" rtlCol="0" anchor="ctr"/>
+          <a:lstStyle/>
+          <a:p>
+            <a:pPr indent="0" marL="0">
+              <a:lnSpc>
+                <a:spcPct val="134000"/>
+              </a:lnSpc>
+              <a:buNone/>
+            </a:pPr>
+            <a:r>
+              <a:rPr lang="en-US" sz="980" dirty="0">
+                <a:solidFill>
+                  <a:srgbClr val="45515E"/>
+                </a:solidFill>
+                <a:latin typeface="Paperlogy 4 Regular" pitchFamily="34" charset="0"/>
+                <a:ea typeface="Paperlogy 4 Regular" pitchFamily="34" charset="-122"/>
+                <a:cs typeface="Paperlogy 4 Regular" pitchFamily="34" charset="-120"/>
+              </a:rPr>
+              <a:t>/v1/embeddings·/v1/rerank에 batch {1·4·16·64}개 입력.</a:t>
+            </a:r>
+            <a:endParaRPr lang="en-US" sz="980" dirty="0"/>
+          </a:p>
+        </p:txBody>
+      </p:sp>
+      <p:sp>
+        <p:nvSpPr>
+          <p:cNvPr id="15" name="Shape 13"/>
+          <p:cNvSpPr/>
+          <p:nvPr/>
+        </p:nvSpPr>
+        <p:spPr>
+          <a:xfrm>
+            <a:off x="8097317" y="2185416"/>
+            <a:ext cx="3637178" cy="1097280"/>
+          </a:xfrm>
+          <a:prstGeom prst="roundRect">
+            <a:avLst>
+              <a:gd name="adj" fmla="val 10833"/>
+            </a:avLst>
+          </a:prstGeom>
+          <a:solidFill>
+            <a:srgbClr val="FFFFFF"/>
+          </a:solidFill>
+          <a:ln w="12700">
+            <a:solidFill>
+              <a:srgbClr val="F2F3F5"/>
+            </a:solidFill>
+            <a:prstDash val="solid"/>
+          </a:ln>
+          <a:effectLst>
+            <a:outerShdw sx="100000" sy="100000" kx="0" ky="0" algn="bl" rotWithShape="0" blurRad="76200" dist="25400" dir="5400000">
+              <a:srgbClr val="000000">
+                <a:alpha val="8000"/>
+              </a:srgbClr>
+            </a:outerShdw>
+          </a:effectLst>
+        </p:spPr>
+      </p:sp>
+      <p:sp>
+        <p:nvSpPr>
+          <p:cNvPr id="16" name="Shape 14"/>
+          <p:cNvSpPr/>
+          <p:nvPr/>
+        </p:nvSpPr>
+        <p:spPr>
+          <a:xfrm>
+            <a:off x="8280197" y="2331720"/>
+            <a:ext cx="658368" cy="256032"/>
+          </a:xfrm>
+          <a:prstGeom prst="roundRect">
+            <a:avLst>
+              <a:gd name="adj" fmla="val 50000"/>
+            </a:avLst>
+          </a:prstGeom>
+          <a:solidFill>
+            <a:srgbClr val="8E8E93"/>
+          </a:solidFill>
+          <a:ln/>
+        </p:spPr>
+      </p:sp>
+      <p:sp>
+        <p:nvSpPr>
+          <p:cNvPr id="17" name="Text 15"/>
+          <p:cNvSpPr/>
+          <p:nvPr/>
+        </p:nvSpPr>
+        <p:spPr>
+          <a:xfrm>
+            <a:off x="8280197" y="2331720"/>
+            <a:ext cx="658368" cy="256032"/>
+          </a:xfrm>
+          <a:prstGeom prst="rect">
+            <a:avLst/>
+          </a:prstGeom>
+          <a:noFill/>
+          <a:ln/>
+        </p:spPr>
+        <p:txBody>
+          <a:bodyPr wrap="square" lIns="0" tIns="0" rIns="0" bIns="0" rtlCol="0" anchor="ctr"/>
+          <a:lstStyle/>
+          <a:p>
+            <a:pPr algn="ctr" indent="0" marL="0">
+              <a:buNone/>
+            </a:pPr>
+            <a:r>
+              <a:rPr lang="en-US" sz="950" dirty="0">
+                <a:solidFill>
+                  <a:srgbClr val="FFFFFF"/>
+                </a:solidFill>
+                <a:latin typeface="Paperlogy 6 SemiBold" pitchFamily="34" charset="0"/>
+                <a:ea typeface="Paperlogy 6 SemiBold" pitchFamily="34" charset="-122"/>
+                <a:cs typeface="Paperlogy 6 SemiBold" pitchFamily="34" charset="-120"/>
+              </a:rPr>
+              <a:t>출력·분석</a:t>
+            </a:r>
+            <a:endParaRPr lang="en-US" sz="950" dirty="0"/>
+          </a:p>
+        </p:txBody>
+      </p:sp>
+      <p:sp>
+        <p:nvSpPr>
+          <p:cNvPr id="18" name="Text 16"/>
+          <p:cNvSpPr/>
+          <p:nvPr/>
+        </p:nvSpPr>
+        <p:spPr>
+          <a:xfrm>
+            <a:off x="8280197" y="2642616"/>
+            <a:ext cx="3271418" cy="530352"/>
+          </a:xfrm>
+          <a:prstGeom prst="rect">
+            <a:avLst/>
+          </a:prstGeom>
+          <a:noFill/>
+          <a:ln/>
+        </p:spPr>
+        <p:txBody>
+          <a:bodyPr wrap="square" lIns="0" tIns="0" rIns="0" bIns="0" rtlCol="0" anchor="ctr"/>
+          <a:lstStyle/>
+          <a:p>
+            <a:pPr indent="0" marL="0">
+              <a:lnSpc>
+                <a:spcPct val="134000"/>
+              </a:lnSpc>
+              <a:buNone/>
+            </a:pPr>
+            <a:r>
+              <a:rPr lang="en-US" sz="980" dirty="0">
+                <a:solidFill>
+                  <a:srgbClr val="45515E"/>
+                </a:solidFill>
+                <a:latin typeface="Paperlogy 4 Regular" pitchFamily="34" charset="0"/>
+                <a:ea typeface="Paperlogy 4 Regular" pitchFamily="34" charset="-122"/>
+                <a:cs typeface="Paperlogy 4 Regular" pitchFamily="34" charset="-120"/>
+              </a:rPr>
+              <a:t>초당 처리 건수(inputs/s), 배치 크기별 효율.</a:t>
+            </a:r>
+            <a:endParaRPr lang="en-US" sz="980" dirty="0"/>
+          </a:p>
+        </p:txBody>
+      </p:sp>
+      <p:sp>
+        <p:nvSpPr>
+          <p:cNvPr id="19" name="Text 17"/>
+          <p:cNvSpPr/>
+          <p:nvPr/>
+        </p:nvSpPr>
+        <p:spPr>
+          <a:xfrm>
+            <a:off x="457200" y="3456432"/>
+            <a:ext cx="1828800" cy="274320"/>
+          </a:xfrm>
+          <a:prstGeom prst="rect">
+            <a:avLst/>
+          </a:prstGeom>
+          <a:noFill/>
+          <a:ln/>
+        </p:spPr>
+        <p:txBody>
+          <a:bodyPr wrap="square" lIns="0" tIns="0" rIns="0" bIns="0" rtlCol="0" anchor="ctr"/>
+          <a:lstStyle/>
+          <a:p>
+            <a:pPr indent="0" marL="0">
+              <a:buNone/>
+            </a:pPr>
+            <a:r>
+              <a:rPr lang="en-US" sz="1300" dirty="0">
+                <a:solidFill>
+                  <a:srgbClr val="1456F0"/>
+                </a:solidFill>
+                <a:latin typeface="Paperlogy 7 Bold" pitchFamily="34" charset="0"/>
+                <a:ea typeface="Paperlogy 7 Bold" pitchFamily="34" charset="-122"/>
+                <a:cs typeface="Paperlogy 7 Bold" pitchFamily="34" charset="-120"/>
+              </a:rPr>
+              <a:t>결과</a:t>
+            </a:r>
+            <a:endParaRPr lang="en-US" sz="1300" dirty="0"/>
+          </a:p>
+        </p:txBody>
+      </p:sp>
+      <p:sp>
+        <p:nvSpPr>
+          <p:cNvPr id="20" name="Shape 18"/>
+          <p:cNvSpPr/>
+          <p:nvPr/>
+        </p:nvSpPr>
+        <p:spPr>
+          <a:xfrm>
+            <a:off x="457200" y="3767328"/>
+            <a:ext cx="3566160" cy="2496312"/>
+          </a:xfrm>
+          <a:prstGeom prst="roundRect">
+            <a:avLst>
+              <a:gd name="adj" fmla="val 4762"/>
+            </a:avLst>
+          </a:prstGeom>
+          <a:solidFill>
+            <a:srgbClr val="FFFFFF"/>
+          </a:solidFill>
+          <a:ln w="12700">
+            <a:solidFill>
+              <a:srgbClr val="F2F3F5"/>
+            </a:solidFill>
+            <a:prstDash val="solid"/>
+          </a:ln>
+          <a:effectLst>
+            <a:outerShdw sx="100000" sy="100000" kx="0" ky="0" algn="bl" rotWithShape="0" blurRad="76200" dist="25400" dir="5400000">
+              <a:srgbClr val="000000">
+                <a:alpha val="8000"/>
+              </a:srgbClr>
+            </a:outerShdw>
+          </a:effectLst>
+        </p:spPr>
+      </p:sp>
+      <p:sp>
+        <p:nvSpPr>
+          <p:cNvPr id="21" name="Text 19"/>
+          <p:cNvSpPr/>
+          <p:nvPr/>
+        </p:nvSpPr>
+        <p:spPr>
+          <a:xfrm>
+            <a:off x="713232" y="3986784"/>
+            <a:ext cx="3054096" cy="274320"/>
+          </a:xfrm>
+          <a:prstGeom prst="rect">
+            <a:avLst/>
+          </a:prstGeom>
+          <a:noFill/>
+          <a:ln/>
+        </p:spPr>
+        <p:txBody>
+          <a:bodyPr wrap="square" lIns="0" tIns="0" rIns="0" bIns="0" rtlCol="0" anchor="ctr"/>
+          <a:lstStyle/>
+          <a:p>
+            <a:pPr indent="0" marL="0">
+              <a:buNone/>
+            </a:pPr>
+            <a:r>
+              <a:rPr lang="en-US" sz="1250" dirty="0">
+                <a:solidFill>
+                  <a:srgbClr val="8E8E93"/>
+                </a:solidFill>
+                <a:latin typeface="Paperlogy 6 SemiBold" pitchFamily="34" charset="0"/>
+                <a:ea typeface="Paperlogy 6 SemiBold" pitchFamily="34" charset="-122"/>
+                <a:cs typeface="Paperlogy 6 SemiBold" pitchFamily="34" charset="-120"/>
+              </a:rPr>
+              <a:t>Qwen3-Embedding-8B</a:t>
+            </a:r>
+            <a:endParaRPr lang="en-US" sz="1250" dirty="0"/>
+          </a:p>
+        </p:txBody>
+      </p:sp>
+      <p:sp>
+        <p:nvSpPr>
+          <p:cNvPr id="22" name="Text 20"/>
+          <p:cNvSpPr/>
+          <p:nvPr/>
+        </p:nvSpPr>
+        <p:spPr>
+          <a:xfrm>
+            <a:off x="713232" y="4297680"/>
+            <a:ext cx="3054096" cy="640080"/>
+          </a:xfrm>
+          <a:prstGeom prst="rect">
+            <a:avLst/>
+          </a:prstGeom>
+          <a:noFill/>
+          <a:ln/>
+        </p:spPr>
+        <p:txBody>
+          <a:bodyPr wrap="square" lIns="0" tIns="0" rIns="0" bIns="0" rtlCol="0" anchor="ctr"/>
+          <a:lstStyle/>
+          <a:p>
+            <a:pPr indent="0" marL="0">
+              <a:buNone/>
+            </a:pPr>
+            <a:r>
+              <a:rPr lang="en-US" sz="4000" dirty="0">
+                <a:solidFill>
+                  <a:srgbClr val="1456F0"/>
+                </a:solidFill>
+                <a:latin typeface="Paperlogy 7 Bold" pitchFamily="34" charset="0"/>
+                <a:ea typeface="Paperlogy 7 Bold" pitchFamily="34" charset="-122"/>
+                <a:cs typeface="Paperlogy 7 Bold" pitchFamily="34" charset="-120"/>
+              </a:rPr>
+              <a:t>1.17</a:t>
+            </a:r>
+            <a:pPr indent="0" marL="0">
+              <a:buNone/>
+            </a:pPr>
+            <a:r>
+              <a:rPr lang="en-US" sz="1300" dirty="0">
+                <a:solidFill>
+                  <a:srgbClr val="45515E"/>
+                </a:solidFill>
+                <a:latin typeface="Paperlogy 6 SemiBold" pitchFamily="34" charset="0"/>
+                <a:ea typeface="Paperlogy 6 SemiBold" pitchFamily="34" charset="-122"/>
+                <a:cs typeface="Paperlogy 6 SemiBold" pitchFamily="34" charset="-120"/>
+              </a:rPr>
+              <a:t>  inputs/s</a:t>
+            </a:r>
+            <a:endParaRPr lang="en-US" sz="4000" dirty="0"/>
+          </a:p>
+        </p:txBody>
+      </p:sp>
+      <p:sp>
+        <p:nvSpPr>
+          <p:cNvPr id="23" name="Text 21"/>
+          <p:cNvSpPr/>
+          <p:nvPr/>
+        </p:nvSpPr>
+        <p:spPr>
+          <a:xfrm>
+            <a:off x="713232" y="5010912"/>
+            <a:ext cx="3054096" cy="457200"/>
+          </a:xfrm>
+          <a:prstGeom prst="rect">
+            <a:avLst/>
+          </a:prstGeom>
+          <a:noFill/>
+          <a:ln/>
+        </p:spPr>
+        <p:txBody>
+          <a:bodyPr wrap="square" lIns="0" tIns="0" rIns="0" bIns="0" rtlCol="0" anchor="ctr"/>
+          <a:lstStyle/>
+          <a:p>
+            <a:pPr indent="0" marL="0">
+              <a:lnSpc>
+                <a:spcPct val="135000"/>
+              </a:lnSpc>
+              <a:buNone/>
+            </a:pPr>
+            <a:r>
+              <a:rPr lang="en-US" sz="980" dirty="0">
+                <a:solidFill>
+                  <a:srgbClr val="45515E"/>
+                </a:solidFill>
+                <a:latin typeface="Paperlogy 4 Regular" pitchFamily="34" charset="0"/>
+                <a:ea typeface="Paperlogy 4 Regular" pitchFamily="34" charset="-122"/>
+                <a:cs typeface="Paperlogy 4 Regular" pitchFamily="34" charset="-120"/>
+              </a:rPr>
+              <a:t>batch 1·16·64 모두 동일 — 배치 이득 없음</a:t>
+            </a:r>
+            <a:endParaRPr lang="en-US" sz="980" dirty="0"/>
+          </a:p>
+        </p:txBody>
+      </p:sp>
+      <p:sp>
+        <p:nvSpPr>
+          <p:cNvPr id="24" name="Shape 22"/>
+          <p:cNvSpPr/>
+          <p:nvPr/>
+        </p:nvSpPr>
+        <p:spPr>
+          <a:xfrm>
+            <a:off x="4206240" y="3767328"/>
+            <a:ext cx="3566160" cy="2496312"/>
+          </a:xfrm>
+          <a:prstGeom prst="roundRect">
+            <a:avLst>
+              <a:gd name="adj" fmla="val 4762"/>
+            </a:avLst>
+          </a:prstGeom>
+          <a:solidFill>
+            <a:srgbClr val="FFFFFF"/>
+          </a:solidFill>
+          <a:ln w="12700">
+            <a:solidFill>
+              <a:srgbClr val="F2F3F5"/>
+            </a:solidFill>
+            <a:prstDash val="solid"/>
+          </a:ln>
+          <a:effectLst>
+            <a:outerShdw sx="100000" sy="100000" kx="0" ky="0" algn="bl" rotWithShape="0" blurRad="76200" dist="25400" dir="5400000">
+              <a:srgbClr val="000000">
+                <a:alpha val="8000"/>
+              </a:srgbClr>
+            </a:outerShdw>
+          </a:effectLst>
+        </p:spPr>
+      </p:sp>
+      <p:sp>
+        <p:nvSpPr>
+          <p:cNvPr id="25" name="Text 23"/>
+          <p:cNvSpPr/>
+          <p:nvPr/>
+        </p:nvSpPr>
+        <p:spPr>
+          <a:xfrm>
+            <a:off x="4462272" y="3986784"/>
+            <a:ext cx="3054096" cy="274320"/>
+          </a:xfrm>
+          <a:prstGeom prst="rect">
+            <a:avLst/>
+          </a:prstGeom>
+          <a:noFill/>
+          <a:ln/>
+        </p:spPr>
+        <p:txBody>
+          <a:bodyPr wrap="square" lIns="0" tIns="0" rIns="0" bIns="0" rtlCol="0" anchor="ctr"/>
+          <a:lstStyle/>
+          <a:p>
+            <a:pPr indent="0" marL="0">
+              <a:buNone/>
+            </a:pPr>
+            <a:r>
+              <a:rPr lang="en-US" sz="1250" dirty="0">
+                <a:solidFill>
+                  <a:srgbClr val="8E8E93"/>
+                </a:solidFill>
+                <a:latin typeface="Paperlogy 6 SemiBold" pitchFamily="34" charset="0"/>
+                <a:ea typeface="Paperlogy 6 SemiBold" pitchFamily="34" charset="-122"/>
+                <a:cs typeface="Paperlogy 6 SemiBold" pitchFamily="34" charset="-120"/>
+              </a:rPr>
+              <a:t>Qwen3-Reranker-8B</a:t>
+            </a:r>
+            <a:endParaRPr lang="en-US" sz="1250" dirty="0"/>
+          </a:p>
+        </p:txBody>
+      </p:sp>
+      <p:sp>
+        <p:nvSpPr>
+          <p:cNvPr id="26" name="Text 24"/>
+          <p:cNvSpPr/>
+          <p:nvPr/>
+        </p:nvSpPr>
+        <p:spPr>
+          <a:xfrm>
+            <a:off x="4462272" y="4297680"/>
+            <a:ext cx="3054096" cy="640080"/>
+          </a:xfrm>
+          <a:prstGeom prst="rect">
+            <a:avLst/>
+          </a:prstGeom>
+          <a:noFill/>
+          <a:ln/>
+        </p:spPr>
+        <p:txBody>
+          <a:bodyPr wrap="square" lIns="0" tIns="0" rIns="0" bIns="0" rtlCol="0" anchor="ctr"/>
+          <a:lstStyle/>
+          <a:p>
+            <a:pPr indent="0" marL="0">
+              <a:buNone/>
+            </a:pPr>
+            <a:r>
+              <a:rPr lang="en-US" sz="4000" dirty="0">
+                <a:solidFill>
+                  <a:srgbClr val="1456F0"/>
+                </a:solidFill>
+                <a:latin typeface="Paperlogy 7 Bold" pitchFamily="34" charset="0"/>
+                <a:ea typeface="Paperlogy 7 Bold" pitchFamily="34" charset="-122"/>
+                <a:cs typeface="Paperlogy 7 Bold" pitchFamily="34" charset="-120"/>
+              </a:rPr>
+              <a:t>1.17</a:t>
+            </a:r>
+            <a:pPr indent="0" marL="0">
+              <a:buNone/>
+            </a:pPr>
+            <a:r>
+              <a:rPr lang="en-US" sz="1300" dirty="0">
+                <a:solidFill>
+                  <a:srgbClr val="45515E"/>
+                </a:solidFill>
+                <a:latin typeface="Paperlogy 6 SemiBold" pitchFamily="34" charset="0"/>
+                <a:ea typeface="Paperlogy 6 SemiBold" pitchFamily="34" charset="-122"/>
+                <a:cs typeface="Paperlogy 6 SemiBold" pitchFamily="34" charset="-120"/>
+              </a:rPr>
+              <a:t>  pairs/s</a:t>
+            </a:r>
+            <a:endParaRPr lang="en-US" sz="4000" dirty="0"/>
+          </a:p>
+        </p:txBody>
+      </p:sp>
+      <p:sp>
+        <p:nvSpPr>
+          <p:cNvPr id="27" name="Text 25"/>
+          <p:cNvSpPr/>
+          <p:nvPr/>
+        </p:nvSpPr>
+        <p:spPr>
+          <a:xfrm>
+            <a:off x="4462272" y="5010912"/>
+            <a:ext cx="3054096" cy="457200"/>
+          </a:xfrm>
+          <a:prstGeom prst="rect">
+            <a:avLst/>
+          </a:prstGeom>
+          <a:noFill/>
+          <a:ln/>
+        </p:spPr>
+        <p:txBody>
+          <a:bodyPr wrap="square" lIns="0" tIns="0" rIns="0" bIns="0" rtlCol="0" anchor="ctr"/>
+          <a:lstStyle/>
+          <a:p>
+            <a:pPr indent="0" marL="0">
+              <a:lnSpc>
+                <a:spcPct val="135000"/>
+              </a:lnSpc>
+              <a:buNone/>
+            </a:pPr>
+            <a:r>
+              <a:rPr lang="en-US" sz="980" dirty="0">
+                <a:solidFill>
+                  <a:srgbClr val="45515E"/>
+                </a:solidFill>
+                <a:latin typeface="Paperlogy 4 Regular" pitchFamily="34" charset="0"/>
+                <a:ea typeface="Paperlogy 4 Regular" pitchFamily="34" charset="-122"/>
+                <a:cs typeface="Paperlogy 4 Regular" pitchFamily="34" charset="-120"/>
+              </a:rPr>
+              <a:t>쿼리당 100문서 ≈ 85초 — 항목당 약 0.85초</a:t>
+            </a:r>
+            <a:endParaRPr lang="en-US" sz="980" dirty="0"/>
+          </a:p>
+        </p:txBody>
+      </p:sp>
+      <p:sp>
+        <p:nvSpPr>
+          <p:cNvPr id="28" name="Shape 26"/>
+          <p:cNvSpPr/>
+          <p:nvPr/>
+        </p:nvSpPr>
+        <p:spPr>
+          <a:xfrm>
+            <a:off x="7955280" y="3767328"/>
+            <a:ext cx="3779215" cy="2496312"/>
+          </a:xfrm>
+          <a:prstGeom prst="roundRect">
+            <a:avLst>
+              <a:gd name="adj" fmla="val 4762"/>
+            </a:avLst>
+          </a:prstGeom>
+          <a:solidFill>
+            <a:srgbClr val="FFFFFF"/>
+          </a:solidFill>
+          <a:ln w="12700">
+            <a:solidFill>
+              <a:srgbClr val="F2F3F5"/>
+            </a:solidFill>
+            <a:prstDash val="solid"/>
+          </a:ln>
+          <a:effectLst>
+            <a:outerShdw sx="100000" sy="100000" kx="0" ky="0" algn="bl" rotWithShape="0" blurRad="76200" dist="25400" dir="5400000">
+              <a:srgbClr val="000000">
+                <a:alpha val="8000"/>
+              </a:srgbClr>
+            </a:outerShdw>
+          </a:effectLst>
+        </p:spPr>
+      </p:sp>
+      <p:sp>
+        <p:nvSpPr>
+          <p:cNvPr id="29" name="Shape 27"/>
+          <p:cNvSpPr/>
+          <p:nvPr/>
+        </p:nvSpPr>
+        <p:spPr>
+          <a:xfrm>
+            <a:off x="7955280" y="4005072"/>
+            <a:ext cx="64008" cy="2020824"/>
+          </a:xfrm>
+          <a:prstGeom prst="roundRect">
+            <a:avLst>
+              <a:gd name="adj" fmla="val 42857"/>
+            </a:avLst>
+          </a:prstGeom>
+          <a:solidFill>
+            <a:srgbClr val="EA5EC1"/>
+          </a:solidFill>
+          <a:ln/>
+        </p:spPr>
+      </p:sp>
+      <p:sp>
+        <p:nvSpPr>
+          <p:cNvPr id="30" name="Text 28"/>
+          <p:cNvSpPr/>
+          <p:nvPr/>
+        </p:nvSpPr>
+        <p:spPr>
+          <a:xfrm>
+            <a:off x="8229600" y="3986784"/>
+            <a:ext cx="3276295" cy="310896"/>
+          </a:xfrm>
+          <a:prstGeom prst="rect">
+            <a:avLst/>
+          </a:prstGeom>
+          <a:noFill/>
+          <a:ln/>
+        </p:spPr>
+        <p:txBody>
+          <a:bodyPr wrap="square" lIns="0" tIns="0" rIns="0" bIns="0" rtlCol="0" anchor="ctr"/>
+          <a:lstStyle/>
+          <a:p>
+            <a:pPr indent="0" marL="0">
+              <a:buNone/>
+            </a:pPr>
+            <a:r>
+              <a:rPr lang="en-US" sz="1400" dirty="0">
+                <a:solidFill>
+                  <a:srgbClr val="222222"/>
+                </a:solidFill>
+                <a:latin typeface="Paperlogy 7 Bold" pitchFamily="34" charset="0"/>
+                <a:ea typeface="Paperlogy 7 Bold" pitchFamily="34" charset="-122"/>
+                <a:cs typeface="Paperlogy 7 Bold" pitchFamily="34" charset="-120"/>
+              </a:rPr>
+              <a:t>처리량 이상 — 별도 점검 필요</a:t>
+            </a:r>
+            <a:endParaRPr lang="en-US" sz="1400" dirty="0"/>
+          </a:p>
+        </p:txBody>
+      </p:sp>
+      <p:sp>
+        <p:nvSpPr>
+          <p:cNvPr id="31" name="Text 29"/>
+          <p:cNvSpPr/>
+          <p:nvPr/>
+        </p:nvSpPr>
+        <p:spPr>
+          <a:xfrm>
+            <a:off x="8229600" y="4352544"/>
+            <a:ext cx="3230575" cy="1673352"/>
+          </a:xfrm>
+          <a:prstGeom prst="rect">
+            <a:avLst/>
+          </a:prstGeom>
+          <a:noFill/>
+          <a:ln/>
+        </p:spPr>
+        <p:txBody>
+          <a:bodyPr wrap="square" lIns="0" tIns="0" rIns="0" bIns="0" rtlCol="0" anchor="ctr"/>
+          <a:lstStyle/>
+          <a:p>
+            <a:pPr indent="0" marL="0">
+              <a:lnSpc>
+                <a:spcPct val="150000"/>
+              </a:lnSpc>
+              <a:buNone/>
+            </a:pPr>
+            <a:r>
+              <a:rPr lang="en-US" sz="1050" dirty="0">
+                <a:solidFill>
+                  <a:srgbClr val="45515E"/>
+                </a:solidFill>
+                <a:latin typeface="Paperlogy 4 Regular" pitchFamily="34" charset="0"/>
+                <a:ea typeface="Paperlogy 4 Regular" pitchFamily="34" charset="-122"/>
+                <a:cs typeface="Paperlogy 4 Regular" pitchFamily="34" charset="-120"/>
+              </a:rPr>
+              <a:t>두 모델 모두 항목당 약 0.85초 — 8B 생성 모델의 단일 prefill(수십 ms) 대비 수십 배 느리다. batch size를 키워도 처리량이 1.17/s로 고정돼 배칭이 동작하지 않는다. 아티팩트의 고정 버킷 패딩 또는 배칭 경로 미최적화 가능성 → 현재 설정으로는 대량 검색에 부적합하며 후속 점검이 필요하다.</a:t>
+            </a:r>
+            <a:endParaRPr lang="en-US" sz="1050" dirty="0"/>
+          </a:p>
+        </p:txBody>
+      </p:sp>
+    </p:spTree>
+  </p:cSld>
+  <p:clrMapOvr>
+    <a:masterClrMapping/>
+  </p:clrMapOvr>
+</p:sld>
+</file>
+
+<file path=ppt/slides/slide18.xml><?xml version="1.0" encoding="utf-8"?>
+<p:sld xmlns:a="http://schemas.openxmlformats.org/drawingml/2006/main" xmlns:r="http://schemas.openxmlformats.org/officeDocument/2006/relationships" xmlns:p="http://schemas.openxmlformats.org/presentationml/2006/main">
+  <p:cSld name="Slide 18">
+    <p:bg>
+      <p:bgPr>
+        <a:solidFill>
+          <a:srgbClr val="FFFFFF"/>
+        </a:solidFill>
+      </p:bgPr>
+    </p:bg>
+    <p:spTree>
+      <p:nvGrpSpPr>
+        <p:cNvPr id="1" name=""/>
+        <p:cNvGrpSpPr/>
+        <p:nvPr/>
+      </p:nvGrpSpPr>
+      <p:grpSpPr>
+        <a:xfrm>
+          <a:off x="0" y="0"/>
+          <a:ext cx="0" cy="0"/>
+          <a:chOff x="0" y="0"/>
+          <a:chExt cx="0" cy="0"/>
+        </a:xfrm>
+      </p:grpSpPr>
+      <p:sp>
+        <p:nvSpPr>
+          <p:cNvPr id="2" name="Text 0"/>
+          <p:cNvSpPr/>
+          <p:nvPr/>
+        </p:nvSpPr>
+        <p:spPr>
+          <a:xfrm>
+            <a:off x="457200" y="365760"/>
+            <a:ext cx="8229600" cy="274320"/>
+          </a:xfrm>
+          <a:prstGeom prst="rect">
+            <a:avLst/>
+          </a:prstGeom>
+          <a:noFill/>
+          <a:ln/>
+        </p:spPr>
+        <p:txBody>
+          <a:bodyPr wrap="square" lIns="0" tIns="0" rIns="0" bIns="0" rtlCol="0" anchor="ctr"/>
+          <a:lstStyle/>
+          <a:p>
+            <a:pPr indent="0" marL="0">
+              <a:buNone/>
+            </a:pPr>
+            <a:r>
+              <a:rPr lang="en-US" sz="1200" spc="80" kern="0" dirty="0">
+                <a:solidFill>
+                  <a:srgbClr val="8E8E93"/>
+                </a:solidFill>
+                <a:latin typeface="Paperlogy 6 SemiBold" pitchFamily="34" charset="0"/>
+                <a:ea typeface="Paperlogy 6 SemiBold" pitchFamily="34" charset="-122"/>
+                <a:cs typeface="Paperlogy 6 SemiBold" pitchFamily="34" charset="-120"/>
+              </a:rPr>
+              <a:t>CONCLUSION</a:t>
+            </a:r>
+            <a:endParaRPr lang="en-US" sz="1200" dirty="0"/>
+          </a:p>
+        </p:txBody>
+      </p:sp>
+      <p:sp>
+        <p:nvSpPr>
+          <p:cNvPr id="3" name="Text 1"/>
+          <p:cNvSpPr/>
+          <p:nvPr/>
+        </p:nvSpPr>
+        <p:spPr>
+          <a:xfrm>
+            <a:off x="457200" y="6446520"/>
+            <a:ext cx="2743200" cy="228600"/>
+          </a:xfrm>
+          <a:prstGeom prst="rect">
+            <a:avLst/>
+          </a:prstGeom>
+          <a:noFill/>
+          <a:ln/>
+        </p:spPr>
+        <p:txBody>
+          <a:bodyPr wrap="square" lIns="0" tIns="0" rIns="0" bIns="0" rtlCol="0" anchor="ctr"/>
+          <a:lstStyle/>
+          <a:p>
+            <a:pPr indent="0" marL="0">
+              <a:buNone/>
+            </a:pPr>
+            <a:r>
+              <a:rPr lang="en-US" sz="1000" dirty="0">
+                <a:solidFill>
+                  <a:srgbClr val="8E8E93"/>
+                </a:solidFill>
+                <a:latin typeface="Paperlogy 5 Medium" pitchFamily="34" charset="0"/>
+                <a:ea typeface="Paperlogy 5 Medium" pitchFamily="34" charset="-122"/>
+                <a:cs typeface="Paperlogy 5 Medium" pitchFamily="34" charset="-120"/>
+              </a:rPr>
+              <a:t>18 / 18</a:t>
             </a:r>
             <a:endParaRPr lang="en-US" sz="1000" dirty="0"/>
           </a:p>
@@ -13572,7 +16957,7 @@
                 <a:ea typeface="Paperlogy 5 Medium" pitchFamily="34" charset="-122"/>
                 <a:cs typeface="Paperlogy 5 Medium" pitchFamily="34" charset="-120"/>
               </a:rPr>
-              <a:t>2 / 16</a:t>
+              <a:t>2 / 18</a:t>
             </a:r>
             <a:endParaRPr lang="en-US" sz="1000" dirty="0"/>
           </a:p>
@@ -15012,7 +18397,7 @@
                 <a:ea typeface="Paperlogy 5 Medium" pitchFamily="34" charset="-122"/>
                 <a:cs typeface="Paperlogy 5 Medium" pitchFamily="34" charset="-120"/>
               </a:rPr>
-              <a:t>3 / 16</a:t>
+              <a:t>3 / 18</a:t>
             </a:r>
             <a:endParaRPr lang="en-US" sz="1000" dirty="0"/>
           </a:p>
@@ -16311,7 +19696,7 @@
                 <a:ea typeface="Paperlogy 5 Medium" pitchFamily="34" charset="-122"/>
                 <a:cs typeface="Paperlogy 5 Medium" pitchFamily="34" charset="-120"/>
               </a:rPr>
-              <a:t>4 / 16</a:t>
+              <a:t>4 / 18</a:t>
             </a:r>
             <a:endParaRPr lang="en-US" sz="1000" dirty="0"/>
           </a:p>
@@ -17083,7 +20468,7 @@
                 <a:ea typeface="Paperlogy 5 Medium" pitchFamily="34" charset="-122"/>
                 <a:cs typeface="Paperlogy 5 Medium" pitchFamily="34" charset="-120"/>
               </a:rPr>
-              <a:t>5 / 16</a:t>
+              <a:t>5 / 18</a:t>
             </a:r>
             <a:endParaRPr lang="en-US" sz="1000" dirty="0"/>
           </a:p>
@@ -18463,7 +21848,7 @@
                 <a:ea typeface="Paperlogy 5 Medium" pitchFamily="34" charset="-122"/>
                 <a:cs typeface="Paperlogy 5 Medium" pitchFamily="34" charset="-120"/>
               </a:rPr>
-              <a:t>6 / 16</a:t>
+              <a:t>6 / 18</a:t>
             </a:r>
             <a:endParaRPr lang="en-US" sz="1000" dirty="0"/>
           </a:p>
@@ -20005,7 +23390,7 @@
                 <a:ea typeface="Paperlogy 5 Medium" pitchFamily="34" charset="-122"/>
                 <a:cs typeface="Paperlogy 5 Medium" pitchFamily="34" charset="-120"/>
               </a:rPr>
-              <a:t>7 / 16</a:t>
+              <a:t>7 / 18</a:t>
             </a:r>
             <a:endParaRPr lang="en-US" sz="1000" dirty="0"/>
           </a:p>
@@ -21243,7 +24628,7 @@
                 <a:ea typeface="Paperlogy 5 Medium" pitchFamily="34" charset="-122"/>
                 <a:cs typeface="Paperlogy 5 Medium" pitchFamily="34" charset="-120"/>
               </a:rPr>
-              <a:t>8 / 16</a:t>
+              <a:t>8 / 18</a:t>
             </a:r>
             <a:endParaRPr lang="en-US" sz="1000" dirty="0"/>
           </a:p>
@@ -22543,7 +25928,7 @@
                 <a:ea typeface="Paperlogy 5 Medium" pitchFamily="34" charset="-122"/>
                 <a:cs typeface="Paperlogy 5 Medium" pitchFamily="34" charset="-120"/>
               </a:rPr>
-              <a:t>9 / 16</a:t>
+              <a:t>9 / 18</a:t>
             </a:r>
             <a:endParaRPr lang="en-US" sz="1000" dirty="0"/>
           </a:p>
